--- a/NestUp_Group2_Presentation.pptx
+++ b/NestUp_Group2_Presentation.pptx
@@ -16665,6 +16665,10 @@
             <a:prstDash val="solid"/>
           </a:ln>
         </p:spPr>
+        <p:txBody>
+          <a:bodyPr/>
+          <a:p/>
+        </p:txBody>
       </p:sp>
       <p:sp>
         <p:nvSpPr>
@@ -16696,7 +16700,7 @@
                   <a:srgbClr val="163A45"/>
                 </a:solidFill>
               </a:rPr>
-              <a:t>Speaker: Varish</a:t>
+              <a:t>Speaker: Prasamsha</a:t>
             </a:r>
             <a:endParaRPr lang="en-US" sz="970" dirty="0"/>
           </a:p>
@@ -16728,6 +16732,10 @@
             <a:prstDash val="solid"/>
           </a:ln>
         </p:spPr>
+        <p:txBody>
+          <a:bodyPr/>
+          <a:p/>
+        </p:txBody>
       </p:sp>
       <p:pic>
         <p:nvPicPr>
@@ -16853,6 +16861,10 @@
             <a:prstDash val="solid"/>
           </a:ln>
         </p:spPr>
+        <p:txBody>
+          <a:bodyPr/>
+          <a:p/>
+        </p:txBody>
       </p:sp>
       <p:sp>
         <p:nvSpPr>
@@ -16990,6 +17002,10 @@
             <a:prstDash val="solid"/>
           </a:ln>
         </p:spPr>
+        <p:txBody>
+          <a:bodyPr/>
+          <a:p/>
+        </p:txBody>
       </p:sp>
       <p:sp>
         <p:nvSpPr>
@@ -17127,6 +17143,10 @@
             <a:prstDash val="solid"/>
           </a:ln>
         </p:spPr>
+        <p:txBody>
+          <a:bodyPr/>
+          <a:p/>
+        </p:txBody>
       </p:sp>
       <p:sp>
         <p:nvSpPr>
@@ -17264,6 +17284,10 @@
             <a:prstDash val="solid"/>
           </a:ln>
         </p:spPr>
+        <p:txBody>
+          <a:bodyPr/>
+          <a:p/>
+        </p:txBody>
       </p:sp>
       <p:sp>
         <p:nvSpPr>
@@ -19930,1185 +19954,30 @@
           <a:chExt cx="0" cy="0"/>
         </a:xfrm>
       </p:grpSpPr>
-      <p:sp>
-        <p:nvSpPr>
-          <p:cNvPr id="2" name="Text 0"/>
-          <p:cNvSpPr/>
-          <p:nvPr/>
-        </p:nvSpPr>
-        <p:spPr>
-          <a:xfrm>
-            <a:off x="640080" y="411480"/>
-            <a:ext cx="10698480" cy="438912"/>
-          </a:xfrm>
-          <a:prstGeom prst="rect">
-            <a:avLst/>
-          </a:prstGeom>
-          <a:noFill/>
-          <a:ln/>
-        </p:spPr>
-        <p:txBody>
-          <a:bodyPr wrap="square" lIns="0" tIns="0" rIns="0" bIns="0" rtlCol="0" anchor="ctr"/>
-          <a:lstStyle/>
-          <a:p>
-            <a:pPr indent="0" marL="0">
-              <a:buNone/>
-            </a:pPr>
-            <a:r>
-              <a:rPr lang="en-US" sz="2500" b="1" dirty="0">
-                <a:solidFill>
-                  <a:srgbClr val="163A45"/>
-                </a:solidFill>
-                <a:latin typeface="Carlito" pitchFamily="34" charset="0"/>
-                <a:ea typeface="Carlito" pitchFamily="34" charset="-122"/>
-                <a:cs typeface="Carlito" pitchFamily="34" charset="-120"/>
-              </a:rPr>
-              <a:t>Use Case Diagram</a:t>
-            </a:r>
-            <a:endParaRPr lang="en-US" sz="2500" dirty="0"/>
-          </a:p>
-        </p:txBody>
-      </p:sp>
-      <p:sp>
-        <p:nvSpPr>
-          <p:cNvPr id="3" name="Text 1"/>
-          <p:cNvSpPr/>
-          <p:nvPr/>
-        </p:nvSpPr>
-        <p:spPr>
-          <a:xfrm>
-            <a:off x="658368" y="877824"/>
-            <a:ext cx="10789920" cy="310896"/>
-          </a:xfrm>
-          <a:prstGeom prst="rect">
-            <a:avLst/>
-          </a:prstGeom>
-          <a:noFill/>
-          <a:ln/>
-        </p:spPr>
-        <p:txBody>
-          <a:bodyPr wrap="square" lIns="0" tIns="0" rIns="0" bIns="0" rtlCol="0" anchor="ctr"/>
-          <a:lstStyle/>
-          <a:p>
-            <a:pPr indent="0" marL="0">
-              <a:buNone/>
-            </a:pPr>
-            <a:r>
-              <a:rPr lang="en-US" sz="1250" dirty="0">
-                <a:solidFill>
-                  <a:srgbClr val="6B7280"/>
-                </a:solidFill>
-                <a:latin typeface="Carlito" pitchFamily="34" charset="0"/>
-                <a:ea typeface="Carlito" pitchFamily="34" charset="-122"/>
-                <a:cs typeface="Carlito" pitchFamily="34" charset="-120"/>
-              </a:rPr>
-              <a:t>Main actors and the tasks they perform in NestUp</a:t>
-            </a:r>
-            <a:endParaRPr lang="en-US" sz="1250" dirty="0"/>
-          </a:p>
-        </p:txBody>
-      </p:sp>
-      <p:sp>
-        <p:nvSpPr>
-          <p:cNvPr id="4" name="Shape 2"/>
-          <p:cNvSpPr/>
-          <p:nvPr/>
-        </p:nvSpPr>
-        <p:spPr>
-          <a:xfrm>
-            <a:off x="9674352" y="457200"/>
-            <a:ext cx="1810512" cy="347472"/>
-          </a:xfrm>
-          <a:prstGeom prst="roundRect">
-            <a:avLst>
-              <a:gd name="adj" fmla="val 15789"/>
-            </a:avLst>
-          </a:prstGeom>
-          <a:solidFill>
-            <a:srgbClr val="EEE2CD"/>
-          </a:solidFill>
-          <a:ln w="12700">
-            <a:solidFill>
-              <a:srgbClr val="EEE2CD"/>
-            </a:solidFill>
-            <a:prstDash val="solid"/>
-          </a:ln>
-        </p:spPr>
-      </p:sp>
-      <p:sp>
-        <p:nvSpPr>
-          <p:cNvPr id="5" name="Text 3"/>
-          <p:cNvSpPr/>
-          <p:nvPr/>
-        </p:nvSpPr>
-        <p:spPr>
-          <a:xfrm>
-            <a:off x="9747504" y="548640"/>
-            <a:ext cx="1664208" cy="137160"/>
-          </a:xfrm>
-          <a:prstGeom prst="rect">
-            <a:avLst/>
-          </a:prstGeom>
-          <a:noFill/>
-          <a:ln/>
-        </p:spPr>
-        <p:txBody>
-          <a:bodyPr wrap="square" lIns="0" tIns="0" rIns="0" bIns="0" rtlCol="0" anchor="ctr"/>
-          <a:lstStyle/>
-          <a:p>
-            <a:pPr algn="ctr" indent="0" marL="0">
-              <a:buNone/>
-            </a:pPr>
-            <a:r>
-              <a:rPr lang="en-US" sz="970" b="1" dirty="0">
-                <a:solidFill>
-                  <a:srgbClr val="163A45"/>
-                </a:solidFill>
-              </a:rPr>
-              <a:t>Speaker: Harshdeep</a:t>
-            </a:r>
-            <a:endParaRPr lang="en-US" sz="970" dirty="0"/>
-          </a:p>
-        </p:txBody>
-      </p:sp>
-      <p:sp>
-        <p:nvSpPr>
-          <p:cNvPr id="6" name="Shape 4"/>
-          <p:cNvSpPr/>
-          <p:nvPr/>
-        </p:nvSpPr>
-        <p:spPr>
-          <a:xfrm>
-            <a:off x="2926080" y="1234440"/>
-            <a:ext cx="6537960" cy="4983480"/>
-          </a:xfrm>
-          <a:prstGeom prst="roundRect">
-            <a:avLst>
-              <a:gd name="adj" fmla="val 917"/>
-            </a:avLst>
-          </a:prstGeom>
-          <a:solidFill>
-            <a:srgbClr val="FCFCFA"/>
-          </a:solidFill>
-          <a:ln w="19050">
-            <a:solidFill>
-              <a:srgbClr val="1F5A5A"/>
-            </a:solidFill>
-            <a:prstDash val="solid"/>
-          </a:ln>
-        </p:spPr>
-      </p:sp>
-      <p:sp>
-        <p:nvSpPr>
-          <p:cNvPr id="7" name="Text 5"/>
-          <p:cNvSpPr/>
-          <p:nvPr/>
-        </p:nvSpPr>
-        <p:spPr>
-          <a:xfrm>
-            <a:off x="5166360" y="1389888"/>
-            <a:ext cx="2011680" cy="256032"/>
-          </a:xfrm>
-          <a:prstGeom prst="rect">
-            <a:avLst/>
-          </a:prstGeom>
-          <a:noFill/>
-          <a:ln/>
-        </p:spPr>
-        <p:txBody>
-          <a:bodyPr wrap="square" lIns="0" tIns="0" rIns="0" bIns="0" rtlCol="0" anchor="ctr"/>
-          <a:lstStyle/>
-          <a:p>
-            <a:pPr algn="ctr" indent="0" marL="0">
-              <a:buNone/>
-            </a:pPr>
-            <a:r>
-              <a:rPr lang="en-US" sz="1500" b="1" dirty="0">
-                <a:solidFill>
-                  <a:srgbClr val="1F5A5A"/>
-                </a:solidFill>
-              </a:rPr>
-              <a:t>NestUp System</a:t>
-            </a:r>
-            <a:endParaRPr lang="en-US" sz="1500" dirty="0"/>
-          </a:p>
-        </p:txBody>
-      </p:sp>
-      <p:sp>
-        <p:nvSpPr>
-          <p:cNvPr id="8" name="Shape 6"/>
-          <p:cNvSpPr/>
-          <p:nvPr/>
-        </p:nvSpPr>
-        <p:spPr>
-          <a:xfrm>
-            <a:off x="3703320" y="1874520"/>
-            <a:ext cx="2240280" cy="566928"/>
-          </a:xfrm>
-          <a:prstGeom prst="ellipse">
-            <a:avLst/>
-          </a:prstGeom>
-          <a:solidFill>
-            <a:srgbClr val="DCEBE4"/>
-          </a:solidFill>
-          <a:ln w="12700">
-            <a:solidFill>
-              <a:srgbClr val="1F5A5A"/>
-            </a:solidFill>
-            <a:prstDash val="solid"/>
-          </a:ln>
-        </p:spPr>
-      </p:sp>
-      <p:sp>
-        <p:nvSpPr>
-          <p:cNvPr id="9" name="Text 7"/>
-          <p:cNvSpPr/>
-          <p:nvPr/>
-        </p:nvSpPr>
-        <p:spPr>
-          <a:xfrm>
-            <a:off x="3813048" y="2029968"/>
-            <a:ext cx="2020824" cy="182880"/>
-          </a:xfrm>
-          <a:prstGeom prst="rect">
-            <a:avLst/>
-          </a:prstGeom>
-          <a:noFill/>
-          <a:ln/>
-        </p:spPr>
-        <p:txBody>
-          <a:bodyPr wrap="square" lIns="0" tIns="0" rIns="0" bIns="0" rtlCol="0" anchor="ctr">
-            <a:normAutofit/>
-          </a:bodyPr>
-          <a:lstStyle/>
-          <a:p>
-            <a:pPr algn="ctr" indent="0" marL="0">
-              <a:buNone/>
-            </a:pPr>
-            <a:r>
-              <a:rPr lang="en-US" sz="1150" b="1" dirty="0">
-                <a:solidFill>
-                  <a:srgbClr val="163A45"/>
-                </a:solidFill>
-              </a:rPr>
-              <a:t>Manage property listings</a:t>
-            </a:r>
-            <a:endParaRPr lang="en-US" sz="1150" dirty="0"/>
-          </a:p>
-        </p:txBody>
-      </p:sp>
-      <p:sp>
-        <p:nvSpPr>
-          <p:cNvPr id="10" name="Shape 8"/>
-          <p:cNvSpPr/>
-          <p:nvPr/>
-        </p:nvSpPr>
-        <p:spPr>
-          <a:xfrm>
-            <a:off x="6400800" y="1874520"/>
-            <a:ext cx="2240280" cy="566928"/>
-          </a:xfrm>
-          <a:prstGeom prst="ellipse">
-            <a:avLst/>
-          </a:prstGeom>
-          <a:solidFill>
-            <a:srgbClr val="DCEBE4"/>
-          </a:solidFill>
-          <a:ln w="12700">
-            <a:solidFill>
-              <a:srgbClr val="1F5A5A"/>
-            </a:solidFill>
-            <a:prstDash val="solid"/>
-          </a:ln>
-        </p:spPr>
-      </p:sp>
-      <p:sp>
-        <p:nvSpPr>
-          <p:cNvPr id="11" name="Text 9"/>
-          <p:cNvSpPr/>
-          <p:nvPr/>
-        </p:nvSpPr>
-        <p:spPr>
-          <a:xfrm>
-            <a:off x="6510528" y="2029968"/>
-            <a:ext cx="2020824" cy="182880"/>
-          </a:xfrm>
-          <a:prstGeom prst="rect">
-            <a:avLst/>
-          </a:prstGeom>
-          <a:noFill/>
-          <a:ln/>
-        </p:spPr>
-        <p:txBody>
-          <a:bodyPr wrap="square" lIns="0" tIns="0" rIns="0" bIns="0" rtlCol="0" anchor="ctr">
-            <a:normAutofit/>
-          </a:bodyPr>
-          <a:lstStyle/>
-          <a:p>
-            <a:pPr algn="ctr" indent="0" marL="0">
-              <a:buNone/>
-            </a:pPr>
-            <a:r>
-              <a:rPr lang="en-US" sz="1150" b="1" dirty="0">
-                <a:solidFill>
-                  <a:srgbClr val="163A45"/>
-                </a:solidFill>
-              </a:rPr>
-              <a:t>Register buyers / vendors</a:t>
-            </a:r>
-            <a:endParaRPr lang="en-US" sz="1150" dirty="0"/>
-          </a:p>
-        </p:txBody>
-      </p:sp>
-      <p:sp>
-        <p:nvSpPr>
-          <p:cNvPr id="12" name="Shape 10"/>
-          <p:cNvSpPr/>
-          <p:nvPr/>
-        </p:nvSpPr>
-        <p:spPr>
-          <a:xfrm>
-            <a:off x="3703320" y="2880360"/>
-            <a:ext cx="2240280" cy="566928"/>
-          </a:xfrm>
-          <a:prstGeom prst="ellipse">
-            <a:avLst/>
-          </a:prstGeom>
-          <a:solidFill>
-            <a:srgbClr val="DCEBE4"/>
-          </a:solidFill>
-          <a:ln w="12700">
-            <a:solidFill>
-              <a:srgbClr val="1F5A5A"/>
-            </a:solidFill>
-            <a:prstDash val="solid"/>
-          </a:ln>
-        </p:spPr>
-      </p:sp>
-      <p:sp>
-        <p:nvSpPr>
-          <p:cNvPr id="13" name="Text 11"/>
-          <p:cNvSpPr/>
-          <p:nvPr/>
-        </p:nvSpPr>
-        <p:spPr>
-          <a:xfrm>
-            <a:off x="3813048" y="3035808"/>
-            <a:ext cx="2020824" cy="182880"/>
-          </a:xfrm>
-          <a:prstGeom prst="rect">
-            <a:avLst/>
-          </a:prstGeom>
-          <a:noFill/>
-          <a:ln/>
-        </p:spPr>
-        <p:txBody>
-          <a:bodyPr wrap="square" lIns="0" tIns="0" rIns="0" bIns="0" rtlCol="0" anchor="ctr">
-            <a:normAutofit/>
-          </a:bodyPr>
-          <a:lstStyle/>
-          <a:p>
-            <a:pPr algn="ctr" indent="0" marL="0">
-              <a:buNone/>
-            </a:pPr>
-            <a:r>
-              <a:rPr lang="en-US" sz="1150" b="1" dirty="0">
-                <a:solidFill>
-                  <a:srgbClr val="163A45"/>
-                </a:solidFill>
-              </a:rPr>
-              <a:t>Filter &amp; match listings</a:t>
-            </a:r>
-            <a:endParaRPr lang="en-US" sz="1150" dirty="0"/>
-          </a:p>
-        </p:txBody>
-      </p:sp>
-      <p:sp>
-        <p:nvSpPr>
-          <p:cNvPr id="14" name="Shape 12"/>
-          <p:cNvSpPr/>
-          <p:nvPr/>
-        </p:nvSpPr>
-        <p:spPr>
-          <a:xfrm>
-            <a:off x="6400800" y="2880360"/>
-            <a:ext cx="2240280" cy="566928"/>
-          </a:xfrm>
-          <a:prstGeom prst="ellipse">
-            <a:avLst/>
-          </a:prstGeom>
-          <a:solidFill>
-            <a:srgbClr val="DCEBE4"/>
-          </a:solidFill>
-          <a:ln w="12700">
-            <a:solidFill>
-              <a:srgbClr val="1F5A5A"/>
-            </a:solidFill>
-            <a:prstDash val="solid"/>
-          </a:ln>
-        </p:spPr>
-      </p:sp>
-      <p:sp>
-        <p:nvSpPr>
-          <p:cNvPr id="15" name="Text 13"/>
-          <p:cNvSpPr/>
-          <p:nvPr/>
-        </p:nvSpPr>
-        <p:spPr>
-          <a:xfrm>
-            <a:off x="6510528" y="3035808"/>
-            <a:ext cx="2020824" cy="182880"/>
-          </a:xfrm>
-          <a:prstGeom prst="rect">
-            <a:avLst/>
-          </a:prstGeom>
-          <a:noFill/>
-          <a:ln/>
-        </p:spPr>
-        <p:txBody>
-          <a:bodyPr wrap="square" lIns="0" tIns="0" rIns="0" bIns="0" rtlCol="0" anchor="ctr">
-            <a:normAutofit/>
-          </a:bodyPr>
-          <a:lstStyle/>
-          <a:p>
-            <a:pPr algn="ctr" indent="0" marL="0">
-              <a:buNone/>
-            </a:pPr>
-            <a:r>
-              <a:rPr lang="en-US" sz="1150" b="1" dirty="0">
-                <a:solidFill>
-                  <a:srgbClr val="163A45"/>
-                </a:solidFill>
-              </a:rPr>
-              <a:t>Book viewings</a:t>
-            </a:r>
-            <a:endParaRPr lang="en-US" sz="1150" dirty="0"/>
-          </a:p>
-        </p:txBody>
-      </p:sp>
-      <p:sp>
-        <p:nvSpPr>
-          <p:cNvPr id="16" name="Shape 14"/>
-          <p:cNvSpPr/>
-          <p:nvPr/>
-        </p:nvSpPr>
-        <p:spPr>
-          <a:xfrm>
-            <a:off x="3703320" y="3886200"/>
-            <a:ext cx="2240280" cy="566928"/>
-          </a:xfrm>
-          <a:prstGeom prst="ellipse">
-            <a:avLst/>
-          </a:prstGeom>
-          <a:solidFill>
-            <a:srgbClr val="DCEBE4"/>
-          </a:solidFill>
-          <a:ln w="12700">
-            <a:solidFill>
-              <a:srgbClr val="1F5A5A"/>
-            </a:solidFill>
-            <a:prstDash val="solid"/>
-          </a:ln>
-        </p:spPr>
-      </p:sp>
-      <p:sp>
-        <p:nvSpPr>
-          <p:cNvPr id="17" name="Text 15"/>
-          <p:cNvSpPr/>
-          <p:nvPr/>
-        </p:nvSpPr>
-        <p:spPr>
-          <a:xfrm>
-            <a:off x="3813048" y="4041648"/>
-            <a:ext cx="2020824" cy="182880"/>
-          </a:xfrm>
-          <a:prstGeom prst="rect">
-            <a:avLst/>
-          </a:prstGeom>
-          <a:noFill/>
-          <a:ln/>
-        </p:spPr>
-        <p:txBody>
-          <a:bodyPr wrap="square" lIns="0" tIns="0" rIns="0" bIns="0" rtlCol="0" anchor="ctr">
-            <a:normAutofit/>
-          </a:bodyPr>
-          <a:lstStyle/>
-          <a:p>
-            <a:pPr algn="ctr" indent="0" marL="0">
-              <a:buNone/>
-            </a:pPr>
-            <a:r>
-              <a:rPr lang="en-US" sz="1150" b="1" dirty="0">
-                <a:solidFill>
-                  <a:srgbClr val="163A45"/>
-                </a:solidFill>
-              </a:rPr>
-              <a:t>Record feedback</a:t>
-            </a:r>
-            <a:endParaRPr lang="en-US" sz="1150" dirty="0"/>
-          </a:p>
-        </p:txBody>
-      </p:sp>
-      <p:sp>
-        <p:nvSpPr>
-          <p:cNvPr id="18" name="Shape 16"/>
-          <p:cNvSpPr/>
-          <p:nvPr/>
-        </p:nvSpPr>
-        <p:spPr>
-          <a:xfrm>
-            <a:off x="6400800" y="3886200"/>
-            <a:ext cx="2240280" cy="566928"/>
-          </a:xfrm>
-          <a:prstGeom prst="ellipse">
-            <a:avLst/>
-          </a:prstGeom>
-          <a:solidFill>
-            <a:srgbClr val="DCEBE4"/>
-          </a:solidFill>
-          <a:ln w="12700">
-            <a:solidFill>
-              <a:srgbClr val="1F5A5A"/>
-            </a:solidFill>
-            <a:prstDash val="solid"/>
-          </a:ln>
-        </p:spPr>
-      </p:sp>
-      <p:sp>
-        <p:nvSpPr>
-          <p:cNvPr id="19" name="Text 17"/>
-          <p:cNvSpPr/>
-          <p:nvPr/>
-        </p:nvSpPr>
-        <p:spPr>
-          <a:xfrm>
-            <a:off x="6510528" y="4041648"/>
-            <a:ext cx="2020824" cy="182880"/>
-          </a:xfrm>
-          <a:prstGeom prst="rect">
-            <a:avLst/>
-          </a:prstGeom>
-          <a:noFill/>
-          <a:ln/>
-        </p:spPr>
-        <p:txBody>
-          <a:bodyPr wrap="square" lIns="0" tIns="0" rIns="0" bIns="0" rtlCol="0" anchor="ctr">
-            <a:normAutofit/>
-          </a:bodyPr>
-          <a:lstStyle/>
-          <a:p>
-            <a:pPr algn="ctr" indent="0" marL="0">
-              <a:buNone/>
-            </a:pPr>
-            <a:r>
-              <a:rPr lang="en-US" sz="1150" b="1" dirty="0">
-                <a:solidFill>
-                  <a:srgbClr val="163A45"/>
-                </a:solidFill>
-              </a:rPr>
-              <a:t>Record / update offers</a:t>
-            </a:r>
-            <a:endParaRPr lang="en-US" sz="1150" dirty="0"/>
-          </a:p>
-        </p:txBody>
-      </p:sp>
-      <p:sp>
-        <p:nvSpPr>
-          <p:cNvPr id="20" name="Shape 18"/>
-          <p:cNvSpPr/>
-          <p:nvPr/>
-        </p:nvSpPr>
-        <p:spPr>
-          <a:xfrm>
-            <a:off x="3703320" y="4892040"/>
-            <a:ext cx="2240280" cy="566928"/>
-          </a:xfrm>
-          <a:prstGeom prst="ellipse">
-            <a:avLst/>
-          </a:prstGeom>
-          <a:solidFill>
-            <a:srgbClr val="DCEBE4"/>
-          </a:solidFill>
-          <a:ln w="12700">
-            <a:solidFill>
-              <a:srgbClr val="1F5A5A"/>
-            </a:solidFill>
-            <a:prstDash val="solid"/>
-          </a:ln>
-        </p:spPr>
-      </p:sp>
-      <p:sp>
-        <p:nvSpPr>
-          <p:cNvPr id="21" name="Text 19"/>
-          <p:cNvSpPr/>
-          <p:nvPr/>
-        </p:nvSpPr>
-        <p:spPr>
-          <a:xfrm>
-            <a:off x="3813048" y="5047488"/>
-            <a:ext cx="2020824" cy="182880"/>
-          </a:xfrm>
-          <a:prstGeom prst="rect">
-            <a:avLst/>
-          </a:prstGeom>
-          <a:noFill/>
-          <a:ln/>
-        </p:spPr>
-        <p:txBody>
-          <a:bodyPr wrap="square" lIns="0" tIns="0" rIns="0" bIns="0" rtlCol="0" anchor="ctr">
-            <a:normAutofit/>
-          </a:bodyPr>
-          <a:lstStyle/>
-          <a:p>
-            <a:pPr algn="ctr" indent="0" marL="0">
-              <a:buNone/>
-            </a:pPr>
-            <a:r>
-              <a:rPr lang="en-US" sz="1150" b="1" dirty="0">
-                <a:solidFill>
-                  <a:srgbClr val="163A45"/>
-                </a:solidFill>
-              </a:rPr>
-              <a:t>Create sale &amp; commission</a:t>
-            </a:r>
-            <a:endParaRPr lang="en-US" sz="1150" dirty="0"/>
-          </a:p>
-        </p:txBody>
-      </p:sp>
-      <p:sp>
-        <p:nvSpPr>
-          <p:cNvPr id="22" name="Shape 20"/>
-          <p:cNvSpPr/>
-          <p:nvPr/>
-        </p:nvSpPr>
-        <p:spPr>
-          <a:xfrm>
-            <a:off x="6400800" y="4892040"/>
-            <a:ext cx="2240280" cy="566928"/>
-          </a:xfrm>
-          <a:prstGeom prst="ellipse">
-            <a:avLst/>
-          </a:prstGeom>
-          <a:solidFill>
-            <a:srgbClr val="DCEBE4"/>
-          </a:solidFill>
-          <a:ln w="12700">
-            <a:solidFill>
-              <a:srgbClr val="1F5A5A"/>
-            </a:solidFill>
-            <a:prstDash val="solid"/>
-          </a:ln>
-        </p:spPr>
-      </p:sp>
-      <p:sp>
-        <p:nvSpPr>
-          <p:cNvPr id="23" name="Text 21"/>
-          <p:cNvSpPr/>
-          <p:nvPr/>
-        </p:nvSpPr>
-        <p:spPr>
-          <a:xfrm>
-            <a:off x="6510528" y="5047488"/>
-            <a:ext cx="2020824" cy="182880"/>
-          </a:xfrm>
-          <a:prstGeom prst="rect">
-            <a:avLst/>
-          </a:prstGeom>
-          <a:noFill/>
-          <a:ln/>
-        </p:spPr>
-        <p:txBody>
-          <a:bodyPr wrap="square" lIns="0" tIns="0" rIns="0" bIns="0" rtlCol="0" anchor="ctr">
-            <a:normAutofit/>
-          </a:bodyPr>
-          <a:lstStyle/>
-          <a:p>
-            <a:pPr algn="ctr" indent="0" marL="0">
-              <a:buNone/>
-            </a:pPr>
-            <a:r>
-              <a:rPr lang="en-US" sz="1150" b="1" dirty="0">
-                <a:solidFill>
-                  <a:srgbClr val="163A45"/>
-                </a:solidFill>
-              </a:rPr>
-              <a:t>Run activity reports</a:t>
-            </a:r>
-            <a:endParaRPr lang="en-US" sz="1150" dirty="0"/>
-          </a:p>
-        </p:txBody>
-      </p:sp>
       <p:pic>
         <p:nvPicPr>
-          <p:cNvPr id="24" name="Image 0" descr="preencoded.png">    </p:cNvPr>
+          <p:cNvPr id="2" name="Picture 1" descr="NestUp_Use_Case_Final.png"/>
           <p:cNvPicPr>
             <a:picLocks noChangeAspect="1"/>
           </p:cNvPicPr>
           <p:nvPr/>
         </p:nvPicPr>
         <p:blipFill>
-          <a:blip r:embed="rId1">
-            <a:extLst>
-              <a:ext uri="{96DAC541-7B7A-43D3-8B79-37D633B846F1}">
-                <asvg:svgBlip xmlns:asvg="http://schemas.microsoft.com/office/drawing/2016/SVG/main" r:embed="rId2"/>
-              </a:ext>
-            </a:extLst>
-          </a:blip>
+          <a:blip r:embed="rId9"/>
           <a:stretch>
             <a:fillRect/>
           </a:stretch>
         </p:blipFill>
         <p:spPr>
           <a:xfrm>
-            <a:off x="1051560" y="1828800"/>
-            <a:ext cx="548640" cy="548640"/>
+            <a:off x="0" y="0"/>
+            <a:ext cx="12192000" cy="6858000"/>
           </a:xfrm>
           <a:prstGeom prst="rect">
             <a:avLst/>
           </a:prstGeom>
         </p:spPr>
       </p:pic>
-      <p:sp>
-        <p:nvSpPr>
-          <p:cNvPr id="25" name="Text 22"/>
-          <p:cNvSpPr/>
-          <p:nvPr/>
-        </p:nvSpPr>
-        <p:spPr>
-          <a:xfrm>
-            <a:off x="640080" y="2441448"/>
-            <a:ext cx="1371600" cy="320040"/>
-          </a:xfrm>
-          <a:prstGeom prst="rect">
-            <a:avLst/>
-          </a:prstGeom>
-          <a:noFill/>
-          <a:ln/>
-        </p:spPr>
-        <p:txBody>
-          <a:bodyPr wrap="square" lIns="0" tIns="0" rIns="0" bIns="0" rtlCol="0" anchor="ctr"/>
-          <a:lstStyle/>
-          <a:p>
-            <a:pPr algn="ctr" indent="0" marL="0">
-              <a:buNone/>
-            </a:pPr>
-            <a:r>
-              <a:rPr lang="en-US" sz="1150" b="1" dirty="0">
-                <a:solidFill>
-                  <a:srgbClr val="1F2937"/>
-                </a:solidFill>
-              </a:rPr>
-              <a:t>Agent</a:t>
-            </a:r>
-            <a:endParaRPr lang="en-US" sz="1150" dirty="0"/>
-          </a:p>
-        </p:txBody>
-      </p:sp>
-      <p:pic>
-        <p:nvPicPr>
-          <p:cNvPr id="26" name="Image 1" descr="preencoded.png">    </p:cNvPr>
-          <p:cNvPicPr>
-            <a:picLocks noChangeAspect="1"/>
-          </p:cNvPicPr>
-          <p:nvPr/>
-        </p:nvPicPr>
-        <p:blipFill>
-          <a:blip r:embed="rId3">
-            <a:extLst>
-              <a:ext uri="{96DAC541-7B7A-43D3-8B79-37D633B846F1}">
-                <asvg:svgBlip xmlns:asvg="http://schemas.microsoft.com/office/drawing/2016/SVG/main" r:embed="rId4"/>
-              </a:ext>
-            </a:extLst>
-          </a:blip>
-          <a:stretch>
-            <a:fillRect/>
-          </a:stretch>
-        </p:blipFill>
-        <p:spPr>
-          <a:xfrm>
-            <a:off x="1051560" y="4434840"/>
-            <a:ext cx="548640" cy="548640"/>
-          </a:xfrm>
-          <a:prstGeom prst="rect">
-            <a:avLst/>
-          </a:prstGeom>
-        </p:spPr>
-      </p:pic>
-      <p:sp>
-        <p:nvSpPr>
-          <p:cNvPr id="27" name="Text 23"/>
-          <p:cNvSpPr/>
-          <p:nvPr/>
-        </p:nvSpPr>
-        <p:spPr>
-          <a:xfrm>
-            <a:off x="640080" y="5047488"/>
-            <a:ext cx="1371600" cy="320040"/>
-          </a:xfrm>
-          <a:prstGeom prst="rect">
-            <a:avLst/>
-          </a:prstGeom>
-          <a:noFill/>
-          <a:ln/>
-        </p:spPr>
-        <p:txBody>
-          <a:bodyPr wrap="square" lIns="0" tIns="0" rIns="0" bIns="0" rtlCol="0" anchor="ctr"/>
-          <a:lstStyle/>
-          <a:p>
-            <a:pPr algn="ctr" indent="0" marL="0">
-              <a:buNone/>
-            </a:pPr>
-            <a:r>
-              <a:rPr lang="en-US" sz="1150" b="1" dirty="0">
-                <a:solidFill>
-                  <a:srgbClr val="1F2937"/>
-                </a:solidFill>
-              </a:rPr>
-              <a:t>Admin / Reception</a:t>
-            </a:r>
-            <a:endParaRPr lang="en-US" sz="1150" dirty="0"/>
-          </a:p>
-        </p:txBody>
-      </p:sp>
-      <p:pic>
-        <p:nvPicPr>
-          <p:cNvPr id="28" name="Image 2" descr="preencoded.png">    </p:cNvPr>
-          <p:cNvPicPr>
-            <a:picLocks noChangeAspect="1"/>
-          </p:cNvPicPr>
-          <p:nvPr/>
-        </p:nvPicPr>
-        <p:blipFill>
-          <a:blip r:embed="rId5">
-            <a:extLst>
-              <a:ext uri="{96DAC541-7B7A-43D3-8B79-37D633B846F1}">
-                <asvg:svgBlip xmlns:asvg="http://schemas.microsoft.com/office/drawing/2016/SVG/main" r:embed="rId6"/>
-              </a:ext>
-            </a:extLst>
-          </a:blip>
-          <a:stretch>
-            <a:fillRect/>
-          </a:stretch>
-        </p:blipFill>
-        <p:spPr>
-          <a:xfrm>
-            <a:off x="10378440" y="2880360"/>
-            <a:ext cx="548640" cy="548640"/>
-          </a:xfrm>
-          <a:prstGeom prst="rect">
-            <a:avLst/>
-          </a:prstGeom>
-        </p:spPr>
-      </p:pic>
-      <p:sp>
-        <p:nvSpPr>
-          <p:cNvPr id="29" name="Text 24"/>
-          <p:cNvSpPr/>
-          <p:nvPr/>
-        </p:nvSpPr>
-        <p:spPr>
-          <a:xfrm>
-            <a:off x="9966960" y="3493008"/>
-            <a:ext cx="1371600" cy="320040"/>
-          </a:xfrm>
-          <a:prstGeom prst="rect">
-            <a:avLst/>
-          </a:prstGeom>
-          <a:noFill/>
-          <a:ln/>
-        </p:spPr>
-        <p:txBody>
-          <a:bodyPr wrap="square" lIns="0" tIns="0" rIns="0" bIns="0" rtlCol="0" anchor="ctr"/>
-          <a:lstStyle/>
-          <a:p>
-            <a:pPr algn="ctr" indent="0" marL="0">
-              <a:buNone/>
-            </a:pPr>
-            <a:r>
-              <a:rPr lang="en-US" sz="1150" b="1" dirty="0">
-                <a:solidFill>
-                  <a:srgbClr val="1F2937"/>
-                </a:solidFill>
-              </a:rPr>
-              <a:t>Branch Manager</a:t>
-            </a:r>
-            <a:endParaRPr lang="en-US" sz="1150" dirty="0"/>
-          </a:p>
-        </p:txBody>
-      </p:sp>
-      <p:sp>
-        <p:nvSpPr>
-          <p:cNvPr id="30" name="Shape 25"/>
-          <p:cNvSpPr/>
-          <p:nvPr/>
-        </p:nvSpPr>
-        <p:spPr>
-          <a:xfrm>
-            <a:off x="1600200" y="2103120"/>
-            <a:ext cx="2103120" cy="54864"/>
-          </a:xfrm>
-          <a:prstGeom prst="line">
-            <a:avLst/>
-          </a:prstGeom>
-          <a:noFill/>
-          <a:ln w="11430">
-            <a:solidFill>
-              <a:srgbClr val="AAB6B8"/>
-            </a:solidFill>
-            <a:prstDash val="solid"/>
-            <a:headEnd type="none"/>
-            <a:tailEnd type="none"/>
-          </a:ln>
-        </p:spPr>
-      </p:sp>
-      <p:sp>
-        <p:nvSpPr>
-          <p:cNvPr id="31" name="Shape 26"/>
-          <p:cNvSpPr/>
-          <p:nvPr/>
-        </p:nvSpPr>
-        <p:spPr>
-          <a:xfrm>
-            <a:off x="1600200" y="2103120"/>
-            <a:ext cx="2103120" cy="1060704"/>
-          </a:xfrm>
-          <a:prstGeom prst="line">
-            <a:avLst/>
-          </a:prstGeom>
-          <a:noFill/>
-          <a:ln w="11430">
-            <a:solidFill>
-              <a:srgbClr val="AAB6B8"/>
-            </a:solidFill>
-            <a:prstDash val="solid"/>
-            <a:headEnd type="none"/>
-            <a:tailEnd type="none"/>
-          </a:ln>
-        </p:spPr>
-      </p:sp>
-      <p:sp>
-        <p:nvSpPr>
-          <p:cNvPr id="32" name="Shape 27"/>
-          <p:cNvSpPr/>
-          <p:nvPr/>
-        </p:nvSpPr>
-        <p:spPr>
-          <a:xfrm>
-            <a:off x="1600200" y="2103120"/>
-            <a:ext cx="4800600" cy="2066544"/>
-          </a:xfrm>
-          <a:prstGeom prst="line">
-            <a:avLst/>
-          </a:prstGeom>
-          <a:noFill/>
-          <a:ln w="11430">
-            <a:solidFill>
-              <a:srgbClr val="AAB6B8"/>
-            </a:solidFill>
-            <a:prstDash val="solid"/>
-            <a:headEnd type="none"/>
-            <a:tailEnd type="none"/>
-          </a:ln>
-        </p:spPr>
-      </p:sp>
-      <p:sp>
-        <p:nvSpPr>
-          <p:cNvPr id="33" name="Shape 28"/>
-          <p:cNvSpPr/>
-          <p:nvPr/>
-        </p:nvSpPr>
-        <p:spPr>
-          <a:xfrm>
-            <a:off x="1600200" y="2103120"/>
-            <a:ext cx="4800600" cy="3072384"/>
-          </a:xfrm>
-          <a:prstGeom prst="line">
-            <a:avLst/>
-          </a:prstGeom>
-          <a:noFill/>
-          <a:ln w="11430">
-            <a:solidFill>
-              <a:srgbClr val="AAB6B8"/>
-            </a:solidFill>
-            <a:prstDash val="solid"/>
-            <a:headEnd type="none"/>
-            <a:tailEnd type="none"/>
-          </a:ln>
-        </p:spPr>
-      </p:sp>
-      <p:sp>
-        <p:nvSpPr>
-          <p:cNvPr id="34" name="Shape 29"/>
-          <p:cNvSpPr/>
-          <p:nvPr/>
-        </p:nvSpPr>
-        <p:spPr>
-          <a:xfrm>
-            <a:off x="1600200" y="4709160"/>
-            <a:ext cx="4800600" cy="-2551176"/>
-          </a:xfrm>
-          <a:prstGeom prst="line">
-            <a:avLst/>
-          </a:prstGeom>
-          <a:noFill/>
-          <a:ln w="11430">
-            <a:solidFill>
-              <a:srgbClr val="AAB6B8"/>
-            </a:solidFill>
-            <a:prstDash val="solid"/>
-            <a:headEnd type="none"/>
-            <a:tailEnd type="none"/>
-          </a:ln>
-        </p:spPr>
-      </p:sp>
-      <p:sp>
-        <p:nvSpPr>
-          <p:cNvPr id="35" name="Shape 30"/>
-          <p:cNvSpPr/>
-          <p:nvPr/>
-        </p:nvSpPr>
-        <p:spPr>
-          <a:xfrm>
-            <a:off x="1600200" y="4709160"/>
-            <a:ext cx="4800600" cy="-1545336"/>
-          </a:xfrm>
-          <a:prstGeom prst="line">
-            <a:avLst/>
-          </a:prstGeom>
-          <a:noFill/>
-          <a:ln w="11430">
-            <a:solidFill>
-              <a:srgbClr val="AAB6B8"/>
-            </a:solidFill>
-            <a:prstDash val="solid"/>
-            <a:headEnd type="none"/>
-            <a:tailEnd type="none"/>
-          </a:ln>
-        </p:spPr>
-      </p:sp>
-      <p:sp>
-        <p:nvSpPr>
-          <p:cNvPr id="36" name="Shape 31"/>
-          <p:cNvSpPr/>
-          <p:nvPr/>
-        </p:nvSpPr>
-        <p:spPr>
-          <a:xfrm>
-            <a:off x="1600200" y="4709160"/>
-            <a:ext cx="2103120" cy="-539496"/>
-          </a:xfrm>
-          <a:prstGeom prst="line">
-            <a:avLst/>
-          </a:prstGeom>
-          <a:noFill/>
-          <a:ln w="11430">
-            <a:solidFill>
-              <a:srgbClr val="AAB6B8"/>
-            </a:solidFill>
-            <a:prstDash val="solid"/>
-            <a:headEnd type="none"/>
-            <a:tailEnd type="none"/>
-          </a:ln>
-        </p:spPr>
-      </p:sp>
-      <p:sp>
-        <p:nvSpPr>
-          <p:cNvPr id="37" name="Shape 32"/>
-          <p:cNvSpPr/>
-          <p:nvPr/>
-        </p:nvSpPr>
-        <p:spPr>
-          <a:xfrm>
-            <a:off x="10378440" y="3163824"/>
-            <a:ext cx="-1737360" cy="2011680"/>
-          </a:xfrm>
-          <a:prstGeom prst="line">
-            <a:avLst/>
-          </a:prstGeom>
-          <a:noFill/>
-          <a:ln w="11430">
-            <a:solidFill>
-              <a:srgbClr val="AAB6B8"/>
-            </a:solidFill>
-            <a:prstDash val="solid"/>
-            <a:headEnd type="none"/>
-            <a:tailEnd type="none"/>
-          </a:ln>
-        </p:spPr>
-      </p:sp>
-      <p:sp>
-        <p:nvSpPr>
-          <p:cNvPr id="38" name="Shape 33"/>
-          <p:cNvSpPr/>
-          <p:nvPr/>
-        </p:nvSpPr>
-        <p:spPr>
-          <a:xfrm>
-            <a:off x="10378440" y="3163824"/>
-            <a:ext cx="-4434840" cy="2011680"/>
-          </a:xfrm>
-          <a:prstGeom prst="line">
-            <a:avLst/>
-          </a:prstGeom>
-          <a:noFill/>
-          <a:ln w="11430">
-            <a:solidFill>
-              <a:srgbClr val="AAB6B8"/>
-            </a:solidFill>
-            <a:prstDash val="solid"/>
-            <a:headEnd type="none"/>
-            <a:tailEnd type="none"/>
-          </a:ln>
-        </p:spPr>
-      </p:sp>
-      <p:sp>
-        <p:nvSpPr>
-          <p:cNvPr id="25" name="Slide Number Placeholder 0"/>
-          <p:cNvSpPr>
-            <a:spLocks noGrp="1"/>
-          </p:cNvSpPr>
-          <p:nvPr>
-            <p:ph type="sldNum" sz="quarter" idx="4294967295"/>
-          </p:nvPr>
-        </p:nvSpPr>
-        <p:spPr>
-          <a:xfrm>
-            <a:off x="11750040" y="6492240"/>
-            <a:ext cx="800000" cy="300000"/>
-          </a:xfrm>
-          <a:prstGeom prst="rect">
-            <a:avLst/>
-          </a:prstGeom>
-          <a:extLst>
-            <a:ext uri="{C572A759-6A51-4108-AA02-DFA0A04FC94B}">
-              <ma14:wrappingTextBoxFlag xmlns:ma14="http://schemas.microsoft.com/office/mac/drawingml/2011/main" val="0"/>
-            </a:ext>
-          </a:extLst>
-        </p:spPr>
-        <p:txBody>
-          <a:bodyPr/>
-          <a:lstStyle>
-            <a:lvl1pPr>
-              <a:defRPr sz="900">
-                <a:solidFill>
-                  <a:srgbClr val="6B7280"/>
-                </a:solidFill>
-                <a:latin typeface="Carlito"/>
-                <a:ea typeface="Carlito"/>
-                <a:cs typeface="Carlito"/>
-              </a:defRPr>
-            </a:lvl1pPr>
-          </a:lstStyle>
-          <a:p>
-            <a:pPr algn="l"/>
-            <a:fld id="{F7021451-1387-4CA6-816F-3879F97B5CBC}" type="slidenum">
-              <a:rPr b="0" lang="en-US"/>
-              <a:t>4</a:t>
-            </a:fld>
-            <a:endParaRPr lang="en-US"/>
-          </a:p>
-        </p:txBody>
-      </p:sp>
     </p:spTree>
   </p:cSld>
   <p:clrMapOvr>
@@ -21589,23 +20458,25 @@
           <a:ln/>
         </p:spPr>
         <p:txBody>
-          <a:bodyPr wrap="square" lIns="127" tIns="127" rIns="127" bIns="127" rtlCol="0" anchor="t">
+          <a:bodyPr wrap="square" lIns="0" tIns="0" rIns="0" bIns="0" rtlCol="0" anchor="t">
             <a:normAutofit/>
           </a:bodyPr>
           <a:lstStyle/>
           <a:p>
-            <a:pPr indent="0" marL="0">
-              <a:buNone/>
+            <a:pPr>
+              <a:spcAft>
+                <a:spcPts val="0"/>
+              </a:spcAft>
             </a:pPr>
             <a:r>
-              <a:rPr lang="en-US" sz="1120" dirty="0">
+              <a:rPr sz="1100">
                 <a:solidFill>
-                  <a:srgbClr val="6B7280"/>
+                  <a:srgbClr val="5B696F"/>
                 </a:solidFill>
+                <a:latin typeface="Aptos"/>
               </a:rPr>
-              <a:t>As an agent, I want each property linked to the correct vendor and handling agent so that ownership and responsibility are clear.</a:t>
+              <a:t>As a vendor, I want my property details linked to my listing so that ownership and property information are clear.</a:t>
             </a:r>
-            <a:endParaRPr lang="en-US" sz="1120" dirty="0"/>
           </a:p>
         </p:txBody>
       </p:sp>
@@ -21756,23 +20627,25 @@
           <a:ln/>
         </p:spPr>
         <p:txBody>
-          <a:bodyPr wrap="square" lIns="127" tIns="127" rIns="127" bIns="127" rtlCol="0" anchor="t">
+          <a:bodyPr wrap="square" lIns="0" tIns="0" rIns="0" bIns="0" rtlCol="0" anchor="t">
             <a:normAutofit/>
           </a:bodyPr>
           <a:lstStyle/>
           <a:p>
-            <a:pPr indent="0" marL="0">
-              <a:buNone/>
+            <a:pPr>
+              <a:spcAft>
+                <a:spcPts val="0"/>
+              </a:spcAft>
             </a:pPr>
             <a:r>
-              <a:rPr lang="en-US" sz="1120" dirty="0">
+              <a:rPr sz="1100">
                 <a:solidFill>
-                  <a:srgbClr val="6B7280"/>
+                  <a:srgbClr val="5B696F"/>
                 </a:solidFill>
+                <a:latin typeface="Aptos"/>
               </a:rPr>
-              <a:t>As an agent or manager, I want commission rates connected to staff records so that sale commission can be calculated consistently.</a:t>
+              <a:t>As a vendor, I want to receive updates about offers on my property so that I can make informed decisions.</a:t>
             </a:r>
-            <a:endParaRPr lang="en-US" sz="1120" dirty="0"/>
           </a:p>
         </p:txBody>
       </p:sp>
@@ -22200,23 +21073,25 @@
           <a:ln/>
         </p:spPr>
         <p:txBody>
-          <a:bodyPr wrap="square" lIns="127" tIns="127" rIns="127" bIns="127" rtlCol="0" anchor="t">
+          <a:bodyPr wrap="square" lIns="0" tIns="0" rIns="0" bIns="0" rtlCol="0" anchor="t">
             <a:normAutofit/>
           </a:bodyPr>
           <a:lstStyle/>
           <a:p>
-            <a:pPr indent="0" marL="0">
-              <a:buNone/>
+            <a:pPr>
+              <a:spcAft>
+                <a:spcPts val="0"/>
+              </a:spcAft>
             </a:pPr>
             <a:r>
-              <a:rPr lang="en-US" sz="1120" dirty="0">
+              <a:rPr sz="1100">
                 <a:solidFill>
-                  <a:srgbClr val="6B7280"/>
+                  <a:srgbClr val="5B696F"/>
                 </a:solidFill>
+                <a:latin typeface="Aptos"/>
               </a:rPr>
-              <a:t>As admin staff, I want to register buyers with a budget and preferences so that their needs can be stored and searched.</a:t>
+              <a:t>As a buyer, I want to register with a budget and preferences so that my needs can be stored and matched.</a:t>
             </a:r>
-            <a:endParaRPr lang="en-US" sz="1120" dirty="0"/>
           </a:p>
         </p:txBody>
       </p:sp>
@@ -22534,23 +21409,25 @@
           <a:ln/>
         </p:spPr>
         <p:txBody>
-          <a:bodyPr wrap="square" lIns="127" tIns="127" rIns="127" bIns="127" rtlCol="0" anchor="t">
+          <a:bodyPr wrap="square" lIns="0" tIns="0" rIns="0" bIns="0" rtlCol="0" anchor="t">
             <a:normAutofit/>
           </a:bodyPr>
           <a:lstStyle/>
           <a:p>
-            <a:pPr indent="0" marL="0">
-              <a:buNone/>
+            <a:pPr>
+              <a:spcAft>
+                <a:spcPts val="0"/>
+              </a:spcAft>
             </a:pPr>
             <a:r>
-              <a:rPr lang="en-US" sz="1120" dirty="0">
+              <a:rPr sz="1100">
                 <a:solidFill>
-                  <a:srgbClr val="6B7280"/>
+                  <a:srgbClr val="5B696F"/>
                 </a:solidFill>
+                <a:latin typeface="Aptos"/>
               </a:rPr>
-              <a:t>As an agent, I want to compare buyer preferences with available properties so that I can create a useful shortlist.</a:t>
+              <a:t>As a buyer, I want to compare suitable properties so that I can create a useful shortlist.</a:t>
             </a:r>
-            <a:endParaRPr lang="en-US" sz="1120" dirty="0"/>
           </a:p>
         </p:txBody>
       </p:sp>
@@ -22978,23 +21855,25 @@
           <a:ln/>
         </p:spPr>
         <p:txBody>
-          <a:bodyPr wrap="square" lIns="127" tIns="127" rIns="127" bIns="127" rtlCol="0" anchor="t">
+          <a:bodyPr wrap="square" lIns="0" tIns="0" rIns="0" bIns="0" rtlCol="0" anchor="t">
             <a:normAutofit/>
           </a:bodyPr>
           <a:lstStyle/>
           <a:p>
-            <a:pPr indent="0" marL="0">
-              <a:buNone/>
+            <a:pPr>
+              <a:spcAft>
+                <a:spcPts val="0"/>
+              </a:spcAft>
             </a:pPr>
             <a:r>
-              <a:rPr lang="en-US" sz="1120" dirty="0">
+              <a:rPr sz="1100">
                 <a:solidFill>
-                  <a:srgbClr val="6B7280"/>
+                  <a:srgbClr val="5B696F"/>
                 </a:solidFill>
+                <a:latin typeface="Aptos"/>
               </a:rPr>
-              <a:t>As an agent, I want to book viewings and record buyer feedback so that the property history is easy to follow.</a:t>
+              <a:t>As a buyer, I want to book viewings and record feedback so that I can evaluate properties.</a:t>
             </a:r>
-            <a:endParaRPr lang="en-US" sz="1120" dirty="0"/>
           </a:p>
         </p:txBody>
       </p:sp>
@@ -23145,23 +22024,25 @@
           <a:ln/>
         </p:spPr>
         <p:txBody>
-          <a:bodyPr wrap="square" lIns="127" tIns="127" rIns="127" bIns="127" rtlCol="0" anchor="t">
+          <a:bodyPr wrap="square" lIns="0" tIns="0" rIns="0" bIns="0" rtlCol="0" anchor="t">
             <a:normAutofit/>
           </a:bodyPr>
           <a:lstStyle/>
           <a:p>
-            <a:pPr indent="0" marL="0">
-              <a:buNone/>
+            <a:pPr>
+              <a:spcAft>
+                <a:spcPts val="0"/>
+              </a:spcAft>
             </a:pPr>
             <a:r>
-              <a:rPr lang="en-US" sz="1120" dirty="0">
+              <a:rPr sz="1100">
                 <a:solidFill>
-                  <a:srgbClr val="6B7280"/>
+                  <a:srgbClr val="5B696F"/>
                 </a:solidFill>
+                <a:latin typeface="Aptos"/>
               </a:rPr>
-              <a:t>As an agent, I want to record offers and update their status so that the negotiation trail is kept in one place.</a:t>
+              <a:t>As a buyer, I want to submit an offer and track its status so that I know how my negotiation is progressing.</a:t>
             </a:r>
-            <a:endParaRPr lang="en-US" sz="1120" dirty="0"/>
           </a:p>
         </p:txBody>
       </p:sp>
@@ -24479,2466 +23360,30 @@
           <a:chExt cx="0" cy="0"/>
         </a:xfrm>
       </p:grpSpPr>
-      <p:sp>
-        <p:nvSpPr>
-          <p:cNvPr id="2" name="Text 0"/>
-          <p:cNvSpPr/>
-          <p:nvPr/>
-        </p:nvSpPr>
-        <p:spPr>
-          <a:xfrm>
-            <a:off x="640080" y="411480"/>
-            <a:ext cx="10698480" cy="438912"/>
-          </a:xfrm>
-          <a:prstGeom prst="rect">
-            <a:avLst/>
-          </a:prstGeom>
-          <a:noFill/>
-          <a:ln/>
-        </p:spPr>
-        <p:txBody>
-          <a:bodyPr wrap="square" lIns="0" tIns="0" rIns="0" bIns="0" rtlCol="0" anchor="ctr"/>
-          <a:lstStyle/>
-          <a:p>
-            <a:pPr indent="0" marL="0">
-              <a:buNone/>
-            </a:pPr>
-            <a:r>
-              <a:rPr lang="en-US" sz="2500" b="1" dirty="0">
-                <a:solidFill>
-                  <a:srgbClr val="163A45"/>
-                </a:solidFill>
-                <a:latin typeface="Carlito" pitchFamily="34" charset="0"/>
-                <a:ea typeface="Carlito" pitchFamily="34" charset="-122"/>
-                <a:cs typeface="Carlito" pitchFamily="34" charset="-120"/>
-              </a:rPr>
-              <a:t>Entity Relationship Diagram</a:t>
-            </a:r>
-            <a:endParaRPr lang="en-US" sz="2500" dirty="0"/>
-          </a:p>
-        </p:txBody>
-      </p:sp>
-      <p:sp>
-        <p:nvSpPr>
-          <p:cNvPr id="3" name="Text 1"/>
-          <p:cNvSpPr/>
-          <p:nvPr/>
-        </p:nvSpPr>
-        <p:spPr>
-          <a:xfrm>
-            <a:off x="658368" y="877824"/>
-            <a:ext cx="10789920" cy="310896"/>
-          </a:xfrm>
-          <a:prstGeom prst="rect">
-            <a:avLst/>
-          </a:prstGeom>
-          <a:noFill/>
-          <a:ln/>
-        </p:spPr>
-        <p:txBody>
-          <a:bodyPr wrap="square" lIns="0" tIns="0" rIns="0" bIns="0" rtlCol="0" anchor="ctr"/>
-          <a:lstStyle/>
-          <a:p>
-            <a:pPr indent="0" marL="0">
-              <a:buNone/>
-            </a:pPr>
-            <a:r>
-              <a:rPr lang="en-US" sz="1250" dirty="0">
-                <a:solidFill>
-                  <a:srgbClr val="6B7280"/>
-                </a:solidFill>
-                <a:latin typeface="Carlito" pitchFamily="34" charset="0"/>
-                <a:ea typeface="Carlito" pitchFamily="34" charset="-122"/>
-                <a:cs typeface="Carlito" pitchFamily="34" charset="-120"/>
-              </a:rPr>
-              <a:t>Physical relational model — 7 entities with PK/FK links</a:t>
-            </a:r>
-            <a:endParaRPr lang="en-US" sz="1250" dirty="0"/>
-          </a:p>
-        </p:txBody>
-      </p:sp>
-      <p:sp>
-        <p:nvSpPr>
-          <p:cNvPr id="4" name="Shape 2"/>
-          <p:cNvSpPr/>
-          <p:nvPr/>
-        </p:nvSpPr>
-        <p:spPr>
-          <a:xfrm>
-            <a:off x="9674352" y="457200"/>
-            <a:ext cx="1810512" cy="347472"/>
-          </a:xfrm>
-          <a:prstGeom prst="roundRect">
-            <a:avLst>
-              <a:gd name="adj" fmla="val 15789"/>
-            </a:avLst>
-          </a:prstGeom>
-          <a:solidFill>
-            <a:srgbClr val="EEE2CD"/>
-          </a:solidFill>
-          <a:ln w="12700">
-            <a:solidFill>
-              <a:srgbClr val="EEE2CD"/>
-            </a:solidFill>
-            <a:prstDash val="solid"/>
-          </a:ln>
-        </p:spPr>
-      </p:sp>
-      <p:sp>
-        <p:nvSpPr>
-          <p:cNvPr id="5" name="Text 3"/>
-          <p:cNvSpPr/>
-          <p:nvPr/>
-        </p:nvSpPr>
-        <p:spPr>
-          <a:xfrm>
-            <a:off x="9747504" y="548640"/>
-            <a:ext cx="1664208" cy="137160"/>
-          </a:xfrm>
-          <a:prstGeom prst="rect">
-            <a:avLst/>
-          </a:prstGeom>
-          <a:noFill/>
-          <a:ln/>
-        </p:spPr>
-        <p:txBody>
-          <a:bodyPr wrap="square" lIns="0" tIns="0" rIns="0" bIns="0" rtlCol="0" anchor="ctr"/>
-          <a:lstStyle/>
-          <a:p>
-            <a:pPr algn="ctr" indent="0" marL="0">
-              <a:buNone/>
-            </a:pPr>
-            <a:r>
-              <a:rPr lang="en-US" sz="970" b="1" dirty="0">
-                <a:solidFill>
-                  <a:srgbClr val="163A45"/>
-                </a:solidFill>
-              </a:rPr>
-              <a:t>Speaker: Varish</a:t>
-            </a:r>
-            <a:endParaRPr lang="en-US" sz="970" dirty="0"/>
-          </a:p>
-        </p:txBody>
-      </p:sp>
-      <p:sp>
-        <p:nvSpPr>
-          <p:cNvPr id="6" name="Shape 4"/>
-          <p:cNvSpPr/>
-          <p:nvPr/>
-        </p:nvSpPr>
-        <p:spPr>
-          <a:xfrm>
-            <a:off x="502920" y="1325880"/>
-            <a:ext cx="1965960" cy="1234440"/>
-          </a:xfrm>
-          <a:prstGeom prst="roundRect">
-            <a:avLst>
-              <a:gd name="adj" fmla="val 2963"/>
-            </a:avLst>
-          </a:prstGeom>
-          <a:solidFill>
-            <a:srgbClr val="FFFFFF"/>
-          </a:solidFill>
-          <a:ln w="19050">
-            <a:solidFill>
-              <a:srgbClr val="1F5A5A"/>
-            </a:solidFill>
-            <a:prstDash val="solid"/>
-          </a:ln>
-        </p:spPr>
-      </p:sp>
-      <p:sp>
-        <p:nvSpPr>
-          <p:cNvPr id="7" name="Shape 5"/>
-          <p:cNvSpPr/>
-          <p:nvPr/>
-        </p:nvSpPr>
-        <p:spPr>
-          <a:xfrm>
-            <a:off x="502920" y="1325880"/>
-            <a:ext cx="1965960" cy="310896"/>
-          </a:xfrm>
-          <a:prstGeom prst="rect">
-            <a:avLst/>
-          </a:prstGeom>
-          <a:solidFill>
-            <a:srgbClr val="1F5A5A"/>
-          </a:solidFill>
-          <a:ln w="12700">
-            <a:solidFill>
-              <a:srgbClr val="1F5A5A"/>
-            </a:solidFill>
-            <a:prstDash val="solid"/>
-          </a:ln>
-        </p:spPr>
-      </p:sp>
-      <p:sp>
-        <p:nvSpPr>
-          <p:cNvPr id="8" name="Text 6"/>
-          <p:cNvSpPr/>
-          <p:nvPr/>
-        </p:nvSpPr>
-        <p:spPr>
-          <a:xfrm>
-            <a:off x="576072" y="1408176"/>
-            <a:ext cx="1819656" cy="118872"/>
-          </a:xfrm>
-          <a:prstGeom prst="rect">
-            <a:avLst/>
-          </a:prstGeom>
-          <a:noFill/>
-          <a:ln/>
-        </p:spPr>
-        <p:txBody>
-          <a:bodyPr wrap="square" lIns="0" tIns="0" rIns="0" bIns="0" rtlCol="0" anchor="ctr"/>
-          <a:lstStyle/>
-          <a:p>
-            <a:pPr algn="ctr" indent="0" marL="0">
-              <a:buNone/>
-            </a:pPr>
-            <a:r>
-              <a:rPr lang="en-US" sz="1050" b="1" dirty="0">
-                <a:solidFill>
-                  <a:srgbClr val="FFFFFF"/>
-                </a:solidFill>
-              </a:rPr>
-              <a:t>AGENT</a:t>
-            </a:r>
-            <a:endParaRPr lang="en-US" sz="1050" dirty="0"/>
-          </a:p>
-        </p:txBody>
-      </p:sp>
-      <p:sp>
-        <p:nvSpPr>
-          <p:cNvPr id="9" name="Text 7"/>
-          <p:cNvSpPr/>
-          <p:nvPr/>
-        </p:nvSpPr>
-        <p:spPr>
-          <a:xfrm>
-            <a:off x="612648" y="1746504"/>
-            <a:ext cx="1746504" cy="731520"/>
-          </a:xfrm>
-          <a:prstGeom prst="rect">
-            <a:avLst/>
-          </a:prstGeom>
-          <a:noFill/>
-          <a:ln/>
-        </p:spPr>
-        <p:txBody>
-          <a:bodyPr wrap="square" lIns="0" tIns="0" rIns="0" bIns="0" rtlCol="0" anchor="t">
-            <a:normAutofit/>
-          </a:bodyPr>
-          <a:lstStyle/>
-          <a:p>
-            <a:pPr indent="0" marL="0">
-              <a:buNone/>
-            </a:pPr>
-            <a:r>
-              <a:rPr lang="en-US" sz="870" dirty="0">
-                <a:solidFill>
-                  <a:srgbClr val="1F2937"/>
-                </a:solidFill>
-              </a:rPr>
-              <a:t>PK agent_id</a:t>
-            </a:r>
-            <a:endParaRPr lang="en-US" sz="870" dirty="0"/>
-          </a:p>
-          <a:p>
-            <a:pPr indent="0" marL="0">
-              <a:buNone/>
-            </a:pPr>
-            <a:r>
-              <a:rPr lang="en-US" sz="870" dirty="0">
-                <a:solidFill>
-                  <a:srgbClr val="1F2937"/>
-                </a:solidFill>
-              </a:rPr>
-              <a:t>name</a:t>
-            </a:r>
-            <a:endParaRPr lang="en-US" sz="870" dirty="0"/>
-          </a:p>
-          <a:p>
-            <a:pPr indent="0" marL="0">
-              <a:buNone/>
-            </a:pPr>
-            <a:r>
-              <a:rPr lang="en-US" sz="870" dirty="0">
-                <a:solidFill>
-                  <a:srgbClr val="1F2937"/>
-                </a:solidFill>
-              </a:rPr>
-              <a:t>contact</a:t>
-            </a:r>
-            <a:endParaRPr lang="en-US" sz="870" dirty="0"/>
-          </a:p>
-          <a:p>
-            <a:pPr indent="0" marL="0">
-              <a:buNone/>
-            </a:pPr>
-            <a:r>
-              <a:rPr lang="en-US" sz="870" dirty="0">
-                <a:solidFill>
-                  <a:srgbClr val="1F2937"/>
-                </a:solidFill>
-              </a:rPr>
-              <a:t>commission_rate</a:t>
-            </a:r>
-            <a:endParaRPr lang="en-US" sz="870" dirty="0"/>
-          </a:p>
-        </p:txBody>
-      </p:sp>
-      <p:sp>
-        <p:nvSpPr>
-          <p:cNvPr id="10" name="Shape 8"/>
-          <p:cNvSpPr/>
-          <p:nvPr/>
-        </p:nvSpPr>
-        <p:spPr>
-          <a:xfrm>
-            <a:off x="502920" y="4251960"/>
-            <a:ext cx="1965960" cy="1060704"/>
-          </a:xfrm>
-          <a:prstGeom prst="roundRect">
-            <a:avLst>
-              <a:gd name="adj" fmla="val 3448"/>
-            </a:avLst>
-          </a:prstGeom>
-          <a:solidFill>
-            <a:srgbClr val="FFFFFF"/>
-          </a:solidFill>
-          <a:ln w="19050">
-            <a:solidFill>
-              <a:srgbClr val="C96F47"/>
-            </a:solidFill>
-            <a:prstDash val="solid"/>
-          </a:ln>
-        </p:spPr>
-      </p:sp>
-      <p:sp>
-        <p:nvSpPr>
-          <p:cNvPr id="11" name="Shape 9"/>
-          <p:cNvSpPr/>
-          <p:nvPr/>
-        </p:nvSpPr>
-        <p:spPr>
-          <a:xfrm>
-            <a:off x="502920" y="4251960"/>
-            <a:ext cx="1965960" cy="310896"/>
-          </a:xfrm>
-          <a:prstGeom prst="rect">
-            <a:avLst/>
-          </a:prstGeom>
-          <a:solidFill>
-            <a:srgbClr val="C96F47"/>
-          </a:solidFill>
-          <a:ln w="12700">
-            <a:solidFill>
-              <a:srgbClr val="C96F47"/>
-            </a:solidFill>
-            <a:prstDash val="solid"/>
-          </a:ln>
-        </p:spPr>
-      </p:sp>
-      <p:sp>
-        <p:nvSpPr>
-          <p:cNvPr id="12" name="Text 10"/>
-          <p:cNvSpPr/>
-          <p:nvPr/>
-        </p:nvSpPr>
-        <p:spPr>
-          <a:xfrm>
-            <a:off x="576072" y="4334256"/>
-            <a:ext cx="1819656" cy="118872"/>
-          </a:xfrm>
-          <a:prstGeom prst="rect">
-            <a:avLst/>
-          </a:prstGeom>
-          <a:noFill/>
-          <a:ln/>
-        </p:spPr>
-        <p:txBody>
-          <a:bodyPr wrap="square" lIns="0" tIns="0" rIns="0" bIns="0" rtlCol="0" anchor="ctr"/>
-          <a:lstStyle/>
-          <a:p>
-            <a:pPr algn="ctr" indent="0" marL="0">
-              <a:buNone/>
-            </a:pPr>
-            <a:r>
-              <a:rPr lang="en-US" sz="1050" b="1" dirty="0">
-                <a:solidFill>
-                  <a:srgbClr val="FFFFFF"/>
-                </a:solidFill>
-              </a:rPr>
-              <a:t>VENDOR</a:t>
-            </a:r>
-            <a:endParaRPr lang="en-US" sz="1050" dirty="0"/>
-          </a:p>
-        </p:txBody>
-      </p:sp>
-      <p:sp>
-        <p:nvSpPr>
-          <p:cNvPr id="13" name="Text 11"/>
-          <p:cNvSpPr/>
-          <p:nvPr/>
-        </p:nvSpPr>
-        <p:spPr>
-          <a:xfrm>
-            <a:off x="612648" y="4672584"/>
-            <a:ext cx="1746504" cy="557784"/>
-          </a:xfrm>
-          <a:prstGeom prst="rect">
-            <a:avLst/>
-          </a:prstGeom>
-          <a:noFill/>
-          <a:ln/>
-        </p:spPr>
-        <p:txBody>
-          <a:bodyPr wrap="square" lIns="0" tIns="0" rIns="0" bIns="0" rtlCol="0" anchor="t">
-            <a:normAutofit/>
-          </a:bodyPr>
-          <a:lstStyle/>
-          <a:p>
-            <a:pPr indent="0" marL="0">
-              <a:buNone/>
-            </a:pPr>
-            <a:r>
-              <a:rPr lang="en-US" sz="870" dirty="0">
-                <a:solidFill>
-                  <a:srgbClr val="1F2937"/>
-                </a:solidFill>
-              </a:rPr>
-              <a:t>PK vendor_id</a:t>
-            </a:r>
-            <a:endParaRPr lang="en-US" sz="870" dirty="0"/>
-          </a:p>
-          <a:p>
-            <a:pPr indent="0" marL="0">
-              <a:buNone/>
-            </a:pPr>
-            <a:r>
-              <a:rPr lang="en-US" sz="870" dirty="0">
-                <a:solidFill>
-                  <a:srgbClr val="1F2937"/>
-                </a:solidFill>
-              </a:rPr>
-              <a:t>name</a:t>
-            </a:r>
-            <a:endParaRPr lang="en-US" sz="870" dirty="0"/>
-          </a:p>
-          <a:p>
-            <a:pPr indent="0" marL="0">
-              <a:buNone/>
-            </a:pPr>
-            <a:r>
-              <a:rPr lang="en-US" sz="870" dirty="0">
-                <a:solidFill>
-                  <a:srgbClr val="1F2937"/>
-                </a:solidFill>
-              </a:rPr>
-              <a:t>contact</a:t>
-            </a:r>
-            <a:endParaRPr lang="en-US" sz="870" dirty="0"/>
-          </a:p>
-        </p:txBody>
-      </p:sp>
-      <p:sp>
-        <p:nvSpPr>
-          <p:cNvPr id="14" name="Shape 12"/>
-          <p:cNvSpPr/>
-          <p:nvPr/>
-        </p:nvSpPr>
-        <p:spPr>
-          <a:xfrm>
-            <a:off x="3035808" y="1965960"/>
-            <a:ext cx="2240280" cy="1700784"/>
-          </a:xfrm>
-          <a:prstGeom prst="roundRect">
-            <a:avLst>
-              <a:gd name="adj" fmla="val 2151"/>
-            </a:avLst>
-          </a:prstGeom>
-          <a:solidFill>
-            <a:srgbClr val="FFFFFF"/>
-          </a:solidFill>
-          <a:ln w="19050">
-            <a:solidFill>
-              <a:srgbClr val="163A45"/>
-            </a:solidFill>
-            <a:prstDash val="solid"/>
-          </a:ln>
-        </p:spPr>
-      </p:sp>
-      <p:sp>
-        <p:nvSpPr>
-          <p:cNvPr id="15" name="Shape 13"/>
-          <p:cNvSpPr/>
-          <p:nvPr/>
-        </p:nvSpPr>
-        <p:spPr>
-          <a:xfrm>
-            <a:off x="3035808" y="1965960"/>
-            <a:ext cx="2240280" cy="310896"/>
-          </a:xfrm>
-          <a:prstGeom prst="rect">
-            <a:avLst/>
-          </a:prstGeom>
-          <a:solidFill>
-            <a:srgbClr val="163A45"/>
-          </a:solidFill>
-          <a:ln w="12700">
-            <a:solidFill>
-              <a:srgbClr val="163A45"/>
-            </a:solidFill>
-            <a:prstDash val="solid"/>
-          </a:ln>
-        </p:spPr>
-      </p:sp>
-      <p:sp>
-        <p:nvSpPr>
-          <p:cNvPr id="16" name="Text 14"/>
-          <p:cNvSpPr/>
-          <p:nvPr/>
-        </p:nvSpPr>
-        <p:spPr>
-          <a:xfrm>
-            <a:off x="3108960" y="2048256"/>
-            <a:ext cx="2093976" cy="118872"/>
-          </a:xfrm>
-          <a:prstGeom prst="rect">
-            <a:avLst/>
-          </a:prstGeom>
-          <a:noFill/>
-          <a:ln/>
-        </p:spPr>
-        <p:txBody>
-          <a:bodyPr wrap="square" lIns="0" tIns="0" rIns="0" bIns="0" rtlCol="0" anchor="ctr"/>
-          <a:lstStyle/>
-          <a:p>
-            <a:pPr algn="ctr" indent="0" marL="0">
-              <a:buNone/>
-            </a:pPr>
-            <a:r>
-              <a:rPr lang="en-US" sz="1050" b="1" dirty="0">
-                <a:solidFill>
-                  <a:srgbClr val="FFFFFF"/>
-                </a:solidFill>
-              </a:rPr>
-              <a:t>PROPERTY</a:t>
-            </a:r>
-            <a:endParaRPr lang="en-US" sz="1050" dirty="0"/>
-          </a:p>
-        </p:txBody>
-      </p:sp>
-      <p:sp>
-        <p:nvSpPr>
-          <p:cNvPr id="17" name="Text 15"/>
-          <p:cNvSpPr/>
-          <p:nvPr/>
-        </p:nvSpPr>
-        <p:spPr>
-          <a:xfrm>
-            <a:off x="3145536" y="2386584"/>
-            <a:ext cx="2020824" cy="1197864"/>
-          </a:xfrm>
-          <a:prstGeom prst="rect">
-            <a:avLst/>
-          </a:prstGeom>
-          <a:noFill/>
-          <a:ln/>
-        </p:spPr>
-        <p:txBody>
-          <a:bodyPr wrap="square" lIns="0" tIns="0" rIns="0" bIns="0" rtlCol="0" anchor="t">
-            <a:normAutofit/>
-          </a:bodyPr>
-          <a:lstStyle/>
-          <a:p>
-            <a:pPr indent="0" marL="0">
-              <a:buNone/>
-            </a:pPr>
-            <a:r>
-              <a:rPr lang="en-US" sz="870" dirty="0">
-                <a:solidFill>
-                  <a:srgbClr val="1F2937"/>
-                </a:solidFill>
-              </a:rPr>
-              <a:t>PK property_id</a:t>
-            </a:r>
-            <a:endParaRPr lang="en-US" sz="870" dirty="0"/>
-          </a:p>
-          <a:p>
-            <a:pPr indent="0" marL="0">
-              <a:buNone/>
-            </a:pPr>
-            <a:r>
-              <a:rPr lang="en-US" sz="870" dirty="0">
-                <a:solidFill>
-                  <a:srgbClr val="1F2937"/>
-                </a:solidFill>
-              </a:rPr>
-              <a:t>address • price • bed_bath</a:t>
-            </a:r>
-            <a:endParaRPr lang="en-US" sz="870" dirty="0"/>
-          </a:p>
-          <a:p>
-            <a:pPr indent="0" marL="0">
-              <a:buNone/>
-            </a:pPr>
-            <a:r>
-              <a:rPr lang="en-US" sz="870" dirty="0">
-                <a:solidFill>
-                  <a:srgbClr val="1F2937"/>
-                </a:solidFill>
-              </a:rPr>
-              <a:t>land_size • status</a:t>
-            </a:r>
-            <a:endParaRPr lang="en-US" sz="870" dirty="0"/>
-          </a:p>
-          <a:p>
-            <a:pPr indent="0" marL="0">
-              <a:buNone/>
-            </a:pPr>
-            <a:r>
-              <a:rPr lang="en-US" sz="870" dirty="0">
-                <a:solidFill>
-                  <a:srgbClr val="1F2937"/>
-                </a:solidFill>
-              </a:rPr>
-              <a:t>FK vendor_id</a:t>
-            </a:r>
-            <a:endParaRPr lang="en-US" sz="870" dirty="0"/>
-          </a:p>
-          <a:p>
-            <a:pPr indent="0" marL="0">
-              <a:buNone/>
-            </a:pPr>
-            <a:r>
-              <a:rPr lang="en-US" sz="870" dirty="0">
-                <a:solidFill>
-                  <a:srgbClr val="1F2937"/>
-                </a:solidFill>
-              </a:rPr>
-              <a:t>FK agent_id</a:t>
-            </a:r>
-            <a:endParaRPr lang="en-US" sz="870" dirty="0"/>
-          </a:p>
-        </p:txBody>
-      </p:sp>
-      <p:sp>
-        <p:nvSpPr>
-          <p:cNvPr id="18" name="Shape 16"/>
-          <p:cNvSpPr/>
-          <p:nvPr/>
-        </p:nvSpPr>
-        <p:spPr>
-          <a:xfrm>
-            <a:off x="5623560" y="960120"/>
-            <a:ext cx="2057400" cy="1536192"/>
-          </a:xfrm>
-          <a:prstGeom prst="roundRect">
-            <a:avLst>
-              <a:gd name="adj" fmla="val 2381"/>
-            </a:avLst>
-          </a:prstGeom>
-          <a:solidFill>
-            <a:srgbClr val="FFFFFF"/>
-          </a:solidFill>
-          <a:ln w="19050">
-            <a:solidFill>
-              <a:srgbClr val="4B7A6A"/>
-            </a:solidFill>
-            <a:prstDash val="solid"/>
-          </a:ln>
-        </p:spPr>
-      </p:sp>
-      <p:sp>
-        <p:nvSpPr>
-          <p:cNvPr id="19" name="Shape 17"/>
-          <p:cNvSpPr/>
-          <p:nvPr/>
-        </p:nvSpPr>
-        <p:spPr>
-          <a:xfrm>
-            <a:off x="5623560" y="960120"/>
-            <a:ext cx="2057400" cy="310896"/>
-          </a:xfrm>
-          <a:prstGeom prst="rect">
-            <a:avLst/>
-          </a:prstGeom>
-          <a:solidFill>
-            <a:srgbClr val="4B7A6A"/>
-          </a:solidFill>
-          <a:ln w="12700">
-            <a:solidFill>
-              <a:srgbClr val="4B7A6A"/>
-            </a:solidFill>
-            <a:prstDash val="solid"/>
-          </a:ln>
-        </p:spPr>
-      </p:sp>
-      <p:sp>
-        <p:nvSpPr>
-          <p:cNvPr id="20" name="Text 18"/>
-          <p:cNvSpPr/>
-          <p:nvPr/>
-        </p:nvSpPr>
-        <p:spPr>
-          <a:xfrm>
-            <a:off x="5696712" y="1042416"/>
-            <a:ext cx="1911096" cy="118872"/>
-          </a:xfrm>
-          <a:prstGeom prst="rect">
-            <a:avLst/>
-          </a:prstGeom>
-          <a:noFill/>
-          <a:ln/>
-        </p:spPr>
-        <p:txBody>
-          <a:bodyPr wrap="square" lIns="0" tIns="0" rIns="0" bIns="0" rtlCol="0" anchor="ctr"/>
-          <a:lstStyle/>
-          <a:p>
-            <a:pPr algn="ctr" indent="0" marL="0">
-              <a:buNone/>
-            </a:pPr>
-            <a:r>
-              <a:rPr lang="en-US" sz="1050" b="1" dirty="0">
-                <a:solidFill>
-                  <a:srgbClr val="FFFFFF"/>
-                </a:solidFill>
-              </a:rPr>
-              <a:t>BUYER</a:t>
-            </a:r>
-            <a:endParaRPr lang="en-US" sz="1050" dirty="0"/>
-          </a:p>
-        </p:txBody>
-      </p:sp>
-      <p:sp>
-        <p:nvSpPr>
-          <p:cNvPr id="21" name="Text 19"/>
-          <p:cNvSpPr/>
-          <p:nvPr/>
-        </p:nvSpPr>
-        <p:spPr>
-          <a:xfrm>
-            <a:off x="5733288" y="1380744"/>
-            <a:ext cx="1837944" cy="1033272"/>
-          </a:xfrm>
-          <a:prstGeom prst="rect">
-            <a:avLst/>
-          </a:prstGeom>
-          <a:noFill/>
-          <a:ln/>
-        </p:spPr>
-        <p:txBody>
-          <a:bodyPr wrap="square" lIns="0" tIns="0" rIns="0" bIns="0" rtlCol="0" anchor="t">
-            <a:normAutofit/>
-          </a:bodyPr>
-          <a:lstStyle/>
-          <a:p>
-            <a:pPr indent="0" marL="0">
-              <a:buNone/>
-            </a:pPr>
-            <a:r>
-              <a:rPr lang="en-US" sz="870" dirty="0">
-                <a:solidFill>
-                  <a:srgbClr val="1F2937"/>
-                </a:solidFill>
-              </a:rPr>
-              <a:t>PK buyer_id</a:t>
-            </a:r>
-            <a:endParaRPr lang="en-US" sz="870" dirty="0"/>
-          </a:p>
-          <a:p>
-            <a:pPr indent="0" marL="0">
-              <a:buNone/>
-            </a:pPr>
-            <a:r>
-              <a:rPr lang="en-US" sz="870" dirty="0">
-                <a:solidFill>
-                  <a:srgbClr val="1F2937"/>
-                </a:solidFill>
-              </a:rPr>
-              <a:t>name • contact</a:t>
-            </a:r>
-            <a:endParaRPr lang="en-US" sz="870" dirty="0"/>
-          </a:p>
-          <a:p>
-            <a:pPr indent="0" marL="0">
-              <a:buNone/>
-            </a:pPr>
-            <a:r>
-              <a:rPr lang="en-US" sz="870" dirty="0">
-                <a:solidFill>
-                  <a:srgbClr val="1F2937"/>
-                </a:solidFill>
-              </a:rPr>
-              <a:t>budget • preferences</a:t>
-            </a:r>
-            <a:endParaRPr lang="en-US" sz="870" dirty="0"/>
-          </a:p>
-        </p:txBody>
-      </p:sp>
-      <p:sp>
-        <p:nvSpPr>
-          <p:cNvPr id="22" name="Shape 20"/>
-          <p:cNvSpPr/>
-          <p:nvPr/>
-        </p:nvSpPr>
-        <p:spPr>
-          <a:xfrm>
-            <a:off x="5623560" y="2862072"/>
-            <a:ext cx="2057400" cy="1554480"/>
-          </a:xfrm>
-          <a:prstGeom prst="roundRect">
-            <a:avLst>
-              <a:gd name="adj" fmla="val 2353"/>
-            </a:avLst>
-          </a:prstGeom>
-          <a:solidFill>
-            <a:srgbClr val="FFFFFF"/>
-          </a:solidFill>
-          <a:ln w="19050">
-            <a:solidFill>
-              <a:srgbClr val="1F5A5A"/>
-            </a:solidFill>
-            <a:prstDash val="solid"/>
-          </a:ln>
-        </p:spPr>
-      </p:sp>
-      <p:sp>
-        <p:nvSpPr>
-          <p:cNvPr id="23" name="Shape 21"/>
-          <p:cNvSpPr/>
-          <p:nvPr/>
-        </p:nvSpPr>
-        <p:spPr>
-          <a:xfrm>
-            <a:off x="5623560" y="2862072"/>
-            <a:ext cx="2057400" cy="310896"/>
-          </a:xfrm>
-          <a:prstGeom prst="rect">
-            <a:avLst/>
-          </a:prstGeom>
-          <a:solidFill>
-            <a:srgbClr val="1F5A5A"/>
-          </a:solidFill>
-          <a:ln w="12700">
-            <a:solidFill>
-              <a:srgbClr val="1F5A5A"/>
-            </a:solidFill>
-            <a:prstDash val="solid"/>
-          </a:ln>
-        </p:spPr>
-      </p:sp>
-      <p:sp>
-        <p:nvSpPr>
-          <p:cNvPr id="24" name="Text 22"/>
-          <p:cNvSpPr/>
-          <p:nvPr/>
-        </p:nvSpPr>
-        <p:spPr>
-          <a:xfrm>
-            <a:off x="5696712" y="2944368"/>
-            <a:ext cx="1911096" cy="118872"/>
-          </a:xfrm>
-          <a:prstGeom prst="rect">
-            <a:avLst/>
-          </a:prstGeom>
-          <a:noFill/>
-          <a:ln/>
-        </p:spPr>
-        <p:txBody>
-          <a:bodyPr wrap="square" lIns="0" tIns="0" rIns="0" bIns="0" rtlCol="0" anchor="ctr"/>
-          <a:lstStyle/>
-          <a:p>
-            <a:pPr algn="ctr" indent="0" marL="0">
-              <a:buNone/>
-            </a:pPr>
-            <a:r>
-              <a:rPr lang="en-US" sz="1050" b="1" dirty="0">
-                <a:solidFill>
-                  <a:srgbClr val="FFFFFF"/>
-                </a:solidFill>
-              </a:rPr>
-              <a:t>VIEWING</a:t>
-            </a:r>
-            <a:endParaRPr lang="en-US" sz="1050" dirty="0"/>
-          </a:p>
-        </p:txBody>
-      </p:sp>
-      <p:sp>
-        <p:nvSpPr>
-          <p:cNvPr id="25" name="Text 23"/>
-          <p:cNvSpPr/>
-          <p:nvPr/>
-        </p:nvSpPr>
-        <p:spPr>
-          <a:xfrm>
-            <a:off x="5733288" y="3282696"/>
-            <a:ext cx="1837944" cy="1051560"/>
-          </a:xfrm>
-          <a:prstGeom prst="rect">
-            <a:avLst/>
-          </a:prstGeom>
-          <a:noFill/>
-          <a:ln/>
-        </p:spPr>
-        <p:txBody>
-          <a:bodyPr wrap="square" lIns="0" tIns="0" rIns="0" bIns="0" rtlCol="0" anchor="t">
-            <a:normAutofit/>
-          </a:bodyPr>
-          <a:lstStyle/>
-          <a:p>
-            <a:pPr indent="0" marL="0">
-              <a:buNone/>
-            </a:pPr>
-            <a:r>
-              <a:rPr lang="en-US" sz="870" dirty="0">
-                <a:solidFill>
-                  <a:srgbClr val="1F2937"/>
-                </a:solidFill>
-              </a:rPr>
-              <a:t>PK viewing_id</a:t>
-            </a:r>
-            <a:endParaRPr lang="en-US" sz="870" dirty="0"/>
-          </a:p>
-          <a:p>
-            <a:pPr indent="0" marL="0">
-              <a:buNone/>
-            </a:pPr>
-            <a:r>
-              <a:rPr lang="en-US" sz="870" dirty="0">
-                <a:solidFill>
-                  <a:srgbClr val="1F2937"/>
-                </a:solidFill>
-              </a:rPr>
-              <a:t>FK property_id</a:t>
-            </a:r>
-            <a:endParaRPr lang="en-US" sz="870" dirty="0"/>
-          </a:p>
-          <a:p>
-            <a:pPr indent="0" marL="0">
-              <a:buNone/>
-            </a:pPr>
-            <a:r>
-              <a:rPr lang="en-US" sz="870" dirty="0">
-                <a:solidFill>
-                  <a:srgbClr val="1F2937"/>
-                </a:solidFill>
-              </a:rPr>
-              <a:t>FK buyer_id</a:t>
-            </a:r>
-            <a:endParaRPr lang="en-US" sz="870" dirty="0"/>
-          </a:p>
-          <a:p>
-            <a:pPr indent="0" marL="0">
-              <a:buNone/>
-            </a:pPr>
-            <a:r>
-              <a:rPr lang="en-US" sz="870" dirty="0">
-                <a:solidFill>
-                  <a:srgbClr val="1F2937"/>
-                </a:solidFill>
-              </a:rPr>
-              <a:t>date_time • feedback</a:t>
-            </a:r>
-            <a:endParaRPr lang="en-US" sz="870" dirty="0"/>
-          </a:p>
-        </p:txBody>
-      </p:sp>
-      <p:sp>
-        <p:nvSpPr>
-          <p:cNvPr id="26" name="Shape 24"/>
-          <p:cNvSpPr/>
-          <p:nvPr/>
-        </p:nvSpPr>
-        <p:spPr>
-          <a:xfrm>
-            <a:off x="8366760" y="2862072"/>
-            <a:ext cx="1993392" cy="1554480"/>
-          </a:xfrm>
-          <a:prstGeom prst="roundRect">
-            <a:avLst>
-              <a:gd name="adj" fmla="val 2353"/>
-            </a:avLst>
-          </a:prstGeom>
-          <a:solidFill>
-            <a:srgbClr val="FFFFFF"/>
-          </a:solidFill>
-          <a:ln w="19050">
-            <a:solidFill>
-              <a:srgbClr val="C96F47"/>
-            </a:solidFill>
-            <a:prstDash val="solid"/>
-          </a:ln>
-        </p:spPr>
-      </p:sp>
-      <p:sp>
-        <p:nvSpPr>
-          <p:cNvPr id="27" name="Shape 25"/>
-          <p:cNvSpPr/>
-          <p:nvPr/>
-        </p:nvSpPr>
-        <p:spPr>
-          <a:xfrm>
-            <a:off x="8366760" y="2862072"/>
-            <a:ext cx="1993392" cy="310896"/>
-          </a:xfrm>
-          <a:prstGeom prst="rect">
-            <a:avLst/>
-          </a:prstGeom>
-          <a:solidFill>
-            <a:srgbClr val="C96F47"/>
-          </a:solidFill>
-          <a:ln w="12700">
-            <a:solidFill>
-              <a:srgbClr val="C96F47"/>
-            </a:solidFill>
-            <a:prstDash val="solid"/>
-          </a:ln>
-        </p:spPr>
-      </p:sp>
-      <p:sp>
-        <p:nvSpPr>
-          <p:cNvPr id="28" name="Text 26"/>
-          <p:cNvSpPr/>
-          <p:nvPr/>
-        </p:nvSpPr>
-        <p:spPr>
-          <a:xfrm>
-            <a:off x="8439912" y="2944368"/>
-            <a:ext cx="1847088" cy="118872"/>
-          </a:xfrm>
-          <a:prstGeom prst="rect">
-            <a:avLst/>
-          </a:prstGeom>
-          <a:noFill/>
-          <a:ln/>
-        </p:spPr>
-        <p:txBody>
-          <a:bodyPr wrap="square" lIns="0" tIns="0" rIns="0" bIns="0" rtlCol="0" anchor="ctr"/>
-          <a:lstStyle/>
-          <a:p>
-            <a:pPr algn="ctr" indent="0" marL="0">
-              <a:buNone/>
-            </a:pPr>
-            <a:r>
-              <a:rPr lang="en-US" sz="1050" b="1" dirty="0">
-                <a:solidFill>
-                  <a:srgbClr val="FFFFFF"/>
-                </a:solidFill>
-              </a:rPr>
-              <a:t>OFFER</a:t>
-            </a:r>
-            <a:endParaRPr lang="en-US" sz="1050" dirty="0"/>
-          </a:p>
-        </p:txBody>
-      </p:sp>
-      <p:sp>
-        <p:nvSpPr>
-          <p:cNvPr id="29" name="Text 27"/>
-          <p:cNvSpPr/>
-          <p:nvPr/>
-        </p:nvSpPr>
-        <p:spPr>
-          <a:xfrm>
-            <a:off x="8476488" y="3282696"/>
-            <a:ext cx="1773936" cy="1051560"/>
-          </a:xfrm>
-          <a:prstGeom prst="rect">
-            <a:avLst/>
-          </a:prstGeom>
-          <a:noFill/>
-          <a:ln/>
-        </p:spPr>
-        <p:txBody>
-          <a:bodyPr wrap="square" lIns="0" tIns="0" rIns="0" bIns="0" rtlCol="0" anchor="t">
-            <a:normAutofit/>
-          </a:bodyPr>
-          <a:lstStyle/>
-          <a:p>
-            <a:pPr indent="0" marL="0">
-              <a:buNone/>
-            </a:pPr>
-            <a:r>
-              <a:rPr lang="en-US" sz="870" dirty="0">
-                <a:solidFill>
-                  <a:srgbClr val="1F2937"/>
-                </a:solidFill>
-              </a:rPr>
-              <a:t>PK offer_id</a:t>
-            </a:r>
-            <a:endParaRPr lang="en-US" sz="870" dirty="0"/>
-          </a:p>
-          <a:p>
-            <a:pPr indent="0" marL="0">
-              <a:buNone/>
-            </a:pPr>
-            <a:r>
-              <a:rPr lang="en-US" sz="870" dirty="0">
-                <a:solidFill>
-                  <a:srgbClr val="1F2937"/>
-                </a:solidFill>
-              </a:rPr>
-              <a:t>FK property_id</a:t>
-            </a:r>
-            <a:endParaRPr lang="en-US" sz="870" dirty="0"/>
-          </a:p>
-          <a:p>
-            <a:pPr indent="0" marL="0">
-              <a:buNone/>
-            </a:pPr>
-            <a:r>
-              <a:rPr lang="en-US" sz="870" dirty="0">
-                <a:solidFill>
-                  <a:srgbClr val="1F2937"/>
-                </a:solidFill>
-              </a:rPr>
-              <a:t>FK buyer_id</a:t>
-            </a:r>
-            <a:endParaRPr lang="en-US" sz="870" dirty="0"/>
-          </a:p>
-          <a:p>
-            <a:pPr indent="0" marL="0">
-              <a:buNone/>
-            </a:pPr>
-            <a:r>
-              <a:rPr lang="en-US" sz="870" dirty="0">
-                <a:solidFill>
-                  <a:srgbClr val="1F2937"/>
-                </a:solidFill>
-              </a:rPr>
-              <a:t>amount • date • status</a:t>
-            </a:r>
-            <a:endParaRPr lang="en-US" sz="870" dirty="0"/>
-          </a:p>
-        </p:txBody>
-      </p:sp>
-      <p:sp>
-        <p:nvSpPr>
-          <p:cNvPr id="30" name="Shape 28"/>
-          <p:cNvSpPr/>
-          <p:nvPr/>
-        </p:nvSpPr>
-        <p:spPr>
-          <a:xfrm>
-            <a:off x="8366760" y="4800600"/>
-            <a:ext cx="1993392" cy="1261872"/>
-          </a:xfrm>
-          <a:prstGeom prst="roundRect">
-            <a:avLst>
-              <a:gd name="adj" fmla="val 2899"/>
-            </a:avLst>
-          </a:prstGeom>
-          <a:solidFill>
-            <a:srgbClr val="FFFFFF"/>
-          </a:solidFill>
-          <a:ln w="19050">
-            <a:solidFill>
-              <a:srgbClr val="163A45"/>
-            </a:solidFill>
-            <a:prstDash val="solid"/>
-          </a:ln>
-        </p:spPr>
-      </p:sp>
-      <p:sp>
-        <p:nvSpPr>
-          <p:cNvPr id="31" name="Shape 29"/>
-          <p:cNvSpPr/>
-          <p:nvPr/>
-        </p:nvSpPr>
-        <p:spPr>
-          <a:xfrm>
-            <a:off x="8366760" y="4800600"/>
-            <a:ext cx="1993392" cy="310896"/>
-          </a:xfrm>
-          <a:prstGeom prst="rect">
-            <a:avLst/>
-          </a:prstGeom>
-          <a:solidFill>
-            <a:srgbClr val="163A45"/>
-          </a:solidFill>
-          <a:ln w="12700">
-            <a:solidFill>
-              <a:srgbClr val="163A45"/>
-            </a:solidFill>
-            <a:prstDash val="solid"/>
-          </a:ln>
-        </p:spPr>
-      </p:sp>
-      <p:sp>
-        <p:nvSpPr>
-          <p:cNvPr id="32" name="Text 30"/>
-          <p:cNvSpPr/>
-          <p:nvPr/>
-        </p:nvSpPr>
-        <p:spPr>
-          <a:xfrm>
-            <a:off x="8439912" y="4882896"/>
-            <a:ext cx="1847088" cy="118872"/>
-          </a:xfrm>
-          <a:prstGeom prst="rect">
-            <a:avLst/>
-          </a:prstGeom>
-          <a:noFill/>
-          <a:ln/>
-        </p:spPr>
-        <p:txBody>
-          <a:bodyPr wrap="square" lIns="0" tIns="0" rIns="0" bIns="0" rtlCol="0" anchor="ctr"/>
-          <a:lstStyle/>
-          <a:p>
-            <a:pPr algn="ctr" indent="0" marL="0">
-              <a:buNone/>
-            </a:pPr>
-            <a:r>
-              <a:rPr lang="en-US" sz="1050" b="1" dirty="0">
-                <a:solidFill>
-                  <a:srgbClr val="FFFFFF"/>
-                </a:solidFill>
-              </a:rPr>
-              <a:t>SALE</a:t>
-            </a:r>
-            <a:endParaRPr lang="en-US" sz="1050" dirty="0"/>
-          </a:p>
-        </p:txBody>
-      </p:sp>
-      <p:sp>
-        <p:nvSpPr>
-          <p:cNvPr id="33" name="Text 31"/>
-          <p:cNvSpPr/>
-          <p:nvPr/>
-        </p:nvSpPr>
-        <p:spPr>
-          <a:xfrm>
-            <a:off x="8476488" y="5221224"/>
-            <a:ext cx="1773936" cy="758952"/>
-          </a:xfrm>
-          <a:prstGeom prst="rect">
-            <a:avLst/>
-          </a:prstGeom>
-          <a:noFill/>
-          <a:ln/>
-        </p:spPr>
-        <p:txBody>
-          <a:bodyPr wrap="square" lIns="0" tIns="0" rIns="0" bIns="0" rtlCol="0" anchor="t">
-            <a:normAutofit/>
-          </a:bodyPr>
-          <a:lstStyle/>
-          <a:p>
-            <a:pPr indent="0" marL="0">
-              <a:buNone/>
-            </a:pPr>
-            <a:r>
-              <a:rPr lang="en-US" sz="870" dirty="0">
-                <a:solidFill>
-                  <a:srgbClr val="1F2937"/>
-                </a:solidFill>
-              </a:rPr>
-              <a:t>PK sale_id</a:t>
-            </a:r>
-            <a:endParaRPr lang="en-US" sz="870" dirty="0"/>
-          </a:p>
-          <a:p>
-            <a:pPr indent="0" marL="0">
-              <a:buNone/>
-            </a:pPr>
-            <a:r>
-              <a:rPr lang="en-US" sz="870" dirty="0">
-                <a:solidFill>
-                  <a:srgbClr val="1F2937"/>
-                </a:solidFill>
-              </a:rPr>
-              <a:t>UQ/FK offer_id</a:t>
-            </a:r>
-            <a:endParaRPr lang="en-US" sz="870" dirty="0"/>
-          </a:p>
-          <a:p>
-            <a:pPr indent="0" marL="0">
-              <a:buNone/>
-            </a:pPr>
-            <a:r>
-              <a:rPr lang="en-US" sz="870" dirty="0">
-                <a:solidFill>
-                  <a:srgbClr val="1F2937"/>
-                </a:solidFill>
-              </a:rPr>
-              <a:t>final_price • date</a:t>
-            </a:r>
-            <a:endParaRPr lang="en-US" sz="870" dirty="0"/>
-          </a:p>
-          <a:p>
-            <a:pPr indent="0" marL="0">
-              <a:buNone/>
-            </a:pPr>
-            <a:r>
-              <a:rPr lang="en-US" sz="870" dirty="0">
-                <a:solidFill>
-                  <a:srgbClr val="1F2937"/>
-                </a:solidFill>
-              </a:rPr>
-              <a:t>commission</a:t>
-            </a:r>
-            <a:endParaRPr lang="en-US" sz="870" dirty="0"/>
-          </a:p>
-        </p:txBody>
-      </p:sp>
-      <p:sp>
-        <p:nvSpPr>
-          <p:cNvPr id="34" name="Shape 32"/>
-          <p:cNvSpPr/>
-          <p:nvPr/>
-        </p:nvSpPr>
-        <p:spPr>
-          <a:xfrm>
-            <a:off x="2468880" y="1938528"/>
-            <a:ext cx="566928" cy="548640"/>
-          </a:xfrm>
-          <a:prstGeom prst="line">
-            <a:avLst/>
-          </a:prstGeom>
-          <a:noFill/>
-          <a:ln w="16510">
-            <a:solidFill>
-              <a:srgbClr val="1F5A5A"/>
-            </a:solidFill>
-            <a:prstDash val="solid"/>
-            <a:headEnd type="none"/>
-            <a:tailEnd type="none"/>
-          </a:ln>
-        </p:spPr>
-      </p:sp>
-      <p:sp>
-        <p:nvSpPr>
-          <p:cNvPr id="35" name="Shape 33"/>
-          <p:cNvSpPr/>
-          <p:nvPr/>
-        </p:nvSpPr>
-        <p:spPr>
-          <a:xfrm>
-            <a:off x="2578608" y="1938528"/>
-            <a:ext cx="0" cy="182880"/>
-          </a:xfrm>
-          <a:prstGeom prst="line">
-            <a:avLst/>
-          </a:prstGeom>
-          <a:noFill/>
-          <a:ln w="16510">
-            <a:solidFill>
-              <a:srgbClr val="1F5A5A"/>
-            </a:solidFill>
-            <a:prstDash val="solid"/>
-            <a:headEnd type="none"/>
-            <a:tailEnd type="none"/>
-          </a:ln>
-        </p:spPr>
-      </p:sp>
-      <p:sp>
-        <p:nvSpPr>
-          <p:cNvPr id="36" name="Shape 34"/>
-          <p:cNvSpPr/>
-          <p:nvPr/>
-        </p:nvSpPr>
-        <p:spPr>
-          <a:xfrm>
-            <a:off x="2999232" y="2441448"/>
-            <a:ext cx="-109728" cy="0"/>
-          </a:xfrm>
-          <a:prstGeom prst="line">
-            <a:avLst/>
-          </a:prstGeom>
-          <a:noFill/>
-          <a:ln w="13970">
-            <a:solidFill>
-              <a:srgbClr val="1F5A5A"/>
-            </a:solidFill>
-            <a:prstDash val="solid"/>
-            <a:headEnd type="none"/>
-            <a:tailEnd type="none"/>
-          </a:ln>
-        </p:spPr>
-      </p:sp>
-      <p:sp>
-        <p:nvSpPr>
-          <p:cNvPr id="37" name="Shape 35"/>
-          <p:cNvSpPr/>
-          <p:nvPr/>
-        </p:nvSpPr>
-        <p:spPr>
-          <a:xfrm>
-            <a:off x="2999232" y="2441448"/>
-            <a:ext cx="-109728" cy="-109728"/>
-          </a:xfrm>
-          <a:prstGeom prst="line">
-            <a:avLst/>
-          </a:prstGeom>
-          <a:noFill/>
-          <a:ln w="13970">
-            <a:solidFill>
-              <a:srgbClr val="1F5A5A"/>
-            </a:solidFill>
-            <a:prstDash val="solid"/>
-            <a:headEnd type="none"/>
-            <a:tailEnd type="none"/>
-          </a:ln>
-        </p:spPr>
-      </p:sp>
-      <p:sp>
-        <p:nvSpPr>
-          <p:cNvPr id="38" name="Shape 36"/>
-          <p:cNvSpPr/>
-          <p:nvPr/>
-        </p:nvSpPr>
-        <p:spPr>
-          <a:xfrm>
-            <a:off x="2999232" y="2441448"/>
-            <a:ext cx="-109728" cy="109728"/>
-          </a:xfrm>
-          <a:prstGeom prst="line">
-            <a:avLst/>
-          </a:prstGeom>
-          <a:noFill/>
-          <a:ln w="13970">
-            <a:solidFill>
-              <a:srgbClr val="1F5A5A"/>
-            </a:solidFill>
-            <a:prstDash val="solid"/>
-            <a:headEnd type="none"/>
-            <a:tailEnd type="none"/>
-          </a:ln>
-        </p:spPr>
-      </p:sp>
-      <p:sp>
-        <p:nvSpPr>
-          <p:cNvPr id="39" name="Shape 37"/>
-          <p:cNvSpPr/>
-          <p:nvPr/>
-        </p:nvSpPr>
-        <p:spPr>
-          <a:xfrm>
-            <a:off x="2468880" y="4736592"/>
-            <a:ext cx="566928" cy="-1581912"/>
-          </a:xfrm>
-          <a:prstGeom prst="line">
-            <a:avLst/>
-          </a:prstGeom>
-          <a:noFill/>
-          <a:ln w="16510">
-            <a:solidFill>
-              <a:srgbClr val="C96F47"/>
-            </a:solidFill>
-            <a:prstDash val="solid"/>
-            <a:headEnd type="none"/>
-            <a:tailEnd type="none"/>
-          </a:ln>
-        </p:spPr>
-      </p:sp>
-      <p:sp>
-        <p:nvSpPr>
-          <p:cNvPr id="40" name="Shape 38"/>
-          <p:cNvSpPr/>
-          <p:nvPr/>
-        </p:nvSpPr>
-        <p:spPr>
-          <a:xfrm>
-            <a:off x="2578608" y="4343400"/>
-            <a:ext cx="0" cy="182880"/>
-          </a:xfrm>
-          <a:prstGeom prst="line">
-            <a:avLst/>
-          </a:prstGeom>
-          <a:noFill/>
-          <a:ln w="16510">
-            <a:solidFill>
-              <a:srgbClr val="C96F47"/>
-            </a:solidFill>
-            <a:prstDash val="solid"/>
-            <a:headEnd type="none"/>
-            <a:tailEnd type="none"/>
-          </a:ln>
-        </p:spPr>
-      </p:sp>
-      <p:sp>
-        <p:nvSpPr>
-          <p:cNvPr id="41" name="Shape 39"/>
-          <p:cNvSpPr/>
-          <p:nvPr/>
-        </p:nvSpPr>
-        <p:spPr>
-          <a:xfrm>
-            <a:off x="2999232" y="3246120"/>
-            <a:ext cx="-109728" cy="0"/>
-          </a:xfrm>
-          <a:prstGeom prst="line">
-            <a:avLst/>
-          </a:prstGeom>
-          <a:noFill/>
-          <a:ln w="13970">
-            <a:solidFill>
-              <a:srgbClr val="C96F47"/>
-            </a:solidFill>
-            <a:prstDash val="solid"/>
-            <a:headEnd type="none"/>
-            <a:tailEnd type="none"/>
-          </a:ln>
-        </p:spPr>
-      </p:sp>
-      <p:sp>
-        <p:nvSpPr>
-          <p:cNvPr id="42" name="Shape 40"/>
-          <p:cNvSpPr/>
-          <p:nvPr/>
-        </p:nvSpPr>
-        <p:spPr>
-          <a:xfrm>
-            <a:off x="2999232" y="3246120"/>
-            <a:ext cx="-109728" cy="-109728"/>
-          </a:xfrm>
-          <a:prstGeom prst="line">
-            <a:avLst/>
-          </a:prstGeom>
-          <a:noFill/>
-          <a:ln w="13970">
-            <a:solidFill>
-              <a:srgbClr val="C96F47"/>
-            </a:solidFill>
-            <a:prstDash val="solid"/>
-            <a:headEnd type="none"/>
-            <a:tailEnd type="none"/>
-          </a:ln>
-        </p:spPr>
-      </p:sp>
-      <p:sp>
-        <p:nvSpPr>
-          <p:cNvPr id="43" name="Shape 41"/>
-          <p:cNvSpPr/>
-          <p:nvPr/>
-        </p:nvSpPr>
-        <p:spPr>
-          <a:xfrm>
-            <a:off x="2999232" y="3246120"/>
-            <a:ext cx="-109728" cy="109728"/>
-          </a:xfrm>
-          <a:prstGeom prst="line">
-            <a:avLst/>
-          </a:prstGeom>
-          <a:noFill/>
-          <a:ln w="13970">
-            <a:solidFill>
-              <a:srgbClr val="C96F47"/>
-            </a:solidFill>
-            <a:prstDash val="solid"/>
-            <a:headEnd type="none"/>
-            <a:tailEnd type="none"/>
-          </a:ln>
-        </p:spPr>
-      </p:sp>
-      <p:sp>
-        <p:nvSpPr>
-          <p:cNvPr id="44" name="Shape 42"/>
-          <p:cNvSpPr/>
-          <p:nvPr/>
-        </p:nvSpPr>
-        <p:spPr>
-          <a:xfrm>
-            <a:off x="5276088" y="2971800"/>
-            <a:ext cx="347472" cy="484632"/>
-          </a:xfrm>
-          <a:prstGeom prst="line">
-            <a:avLst/>
-          </a:prstGeom>
-          <a:noFill/>
-          <a:ln w="16510">
-            <a:solidFill>
-              <a:srgbClr val="1F5A5A"/>
-            </a:solidFill>
-            <a:prstDash val="solid"/>
-            <a:headEnd type="none"/>
-            <a:tailEnd type="none"/>
-          </a:ln>
-        </p:spPr>
-      </p:sp>
-      <p:sp>
-        <p:nvSpPr>
-          <p:cNvPr id="45" name="Shape 43"/>
-          <p:cNvSpPr/>
-          <p:nvPr/>
-        </p:nvSpPr>
-        <p:spPr>
-          <a:xfrm>
-            <a:off x="5321808" y="2971800"/>
-            <a:ext cx="0" cy="182880"/>
-          </a:xfrm>
-          <a:prstGeom prst="line">
-            <a:avLst/>
-          </a:prstGeom>
-          <a:noFill/>
-          <a:ln w="16510">
-            <a:solidFill>
-              <a:srgbClr val="1F5A5A"/>
-            </a:solidFill>
-            <a:prstDash val="solid"/>
-            <a:headEnd type="none"/>
-            <a:tailEnd type="none"/>
-          </a:ln>
-        </p:spPr>
-      </p:sp>
-      <p:sp>
-        <p:nvSpPr>
-          <p:cNvPr id="46" name="Shape 44"/>
-          <p:cNvSpPr/>
-          <p:nvPr/>
-        </p:nvSpPr>
-        <p:spPr>
-          <a:xfrm>
-            <a:off x="5596128" y="3419856"/>
-            <a:ext cx="-109728" cy="0"/>
-          </a:xfrm>
-          <a:prstGeom prst="line">
-            <a:avLst/>
-          </a:prstGeom>
-          <a:noFill/>
-          <a:ln w="13970">
-            <a:solidFill>
-              <a:srgbClr val="1F5A5A"/>
-            </a:solidFill>
-            <a:prstDash val="solid"/>
-            <a:headEnd type="none"/>
-            <a:tailEnd type="none"/>
-          </a:ln>
-        </p:spPr>
-      </p:sp>
-      <p:sp>
-        <p:nvSpPr>
-          <p:cNvPr id="47" name="Shape 45"/>
-          <p:cNvSpPr/>
-          <p:nvPr/>
-        </p:nvSpPr>
-        <p:spPr>
-          <a:xfrm>
-            <a:off x="5596128" y="3419856"/>
-            <a:ext cx="-109728" cy="-109728"/>
-          </a:xfrm>
-          <a:prstGeom prst="line">
-            <a:avLst/>
-          </a:prstGeom>
-          <a:noFill/>
-          <a:ln w="13970">
-            <a:solidFill>
-              <a:srgbClr val="1F5A5A"/>
-            </a:solidFill>
-            <a:prstDash val="solid"/>
-            <a:headEnd type="none"/>
-            <a:tailEnd type="none"/>
-          </a:ln>
-        </p:spPr>
-      </p:sp>
-      <p:sp>
-        <p:nvSpPr>
-          <p:cNvPr id="48" name="Shape 46"/>
-          <p:cNvSpPr/>
-          <p:nvPr/>
-        </p:nvSpPr>
-        <p:spPr>
-          <a:xfrm>
-            <a:off x="5596128" y="3419856"/>
-            <a:ext cx="-109728" cy="109728"/>
-          </a:xfrm>
-          <a:prstGeom prst="line">
-            <a:avLst/>
-          </a:prstGeom>
-          <a:noFill/>
-          <a:ln w="13970">
-            <a:solidFill>
-              <a:srgbClr val="1F5A5A"/>
-            </a:solidFill>
-            <a:prstDash val="solid"/>
-            <a:headEnd type="none"/>
-            <a:tailEnd type="none"/>
-          </a:ln>
-        </p:spPr>
-      </p:sp>
-      <p:sp>
-        <p:nvSpPr>
-          <p:cNvPr id="49" name="Shape 47"/>
-          <p:cNvSpPr/>
-          <p:nvPr/>
-        </p:nvSpPr>
-        <p:spPr>
-          <a:xfrm>
-            <a:off x="6656832" y="2496312"/>
-            <a:ext cx="0" cy="365760"/>
-          </a:xfrm>
-          <a:prstGeom prst="line">
-            <a:avLst/>
-          </a:prstGeom>
-          <a:noFill/>
-          <a:ln w="16510">
-            <a:solidFill>
-              <a:srgbClr val="4B7A6A"/>
-            </a:solidFill>
-            <a:prstDash val="solid"/>
-            <a:headEnd type="none"/>
-            <a:tailEnd type="none"/>
-          </a:ln>
-        </p:spPr>
-      </p:sp>
-      <p:sp>
-        <p:nvSpPr>
-          <p:cNvPr id="50" name="Shape 48"/>
-          <p:cNvSpPr/>
-          <p:nvPr/>
-        </p:nvSpPr>
-        <p:spPr>
-          <a:xfrm>
-            <a:off x="6565392" y="2578608"/>
-            <a:ext cx="182880" cy="0"/>
-          </a:xfrm>
-          <a:prstGeom prst="line">
-            <a:avLst/>
-          </a:prstGeom>
-          <a:noFill/>
-          <a:ln w="16510">
-            <a:solidFill>
-              <a:srgbClr val="4B7A6A"/>
-            </a:solidFill>
-            <a:prstDash val="solid"/>
-            <a:headEnd type="none"/>
-            <a:tailEnd type="none"/>
-          </a:ln>
-        </p:spPr>
-      </p:sp>
-      <p:sp>
-        <p:nvSpPr>
-          <p:cNvPr id="51" name="Shape 49"/>
-          <p:cNvSpPr/>
-          <p:nvPr/>
-        </p:nvSpPr>
-        <p:spPr>
-          <a:xfrm>
-            <a:off x="6656832" y="2834640"/>
-            <a:ext cx="0" cy="-109728"/>
-          </a:xfrm>
-          <a:prstGeom prst="line">
-            <a:avLst/>
-          </a:prstGeom>
-          <a:noFill/>
-          <a:ln w="13970">
-            <a:solidFill>
-              <a:srgbClr val="4B7A6A"/>
-            </a:solidFill>
-            <a:prstDash val="solid"/>
-            <a:headEnd type="none"/>
-            <a:tailEnd type="none"/>
-          </a:ln>
-        </p:spPr>
-      </p:sp>
-      <p:sp>
-        <p:nvSpPr>
-          <p:cNvPr id="52" name="Shape 50"/>
-          <p:cNvSpPr/>
-          <p:nvPr/>
-        </p:nvSpPr>
-        <p:spPr>
-          <a:xfrm>
-            <a:off x="6656832" y="2834640"/>
-            <a:ext cx="-109728" cy="-109728"/>
-          </a:xfrm>
-          <a:prstGeom prst="line">
-            <a:avLst/>
-          </a:prstGeom>
-          <a:noFill/>
-          <a:ln w="13970">
-            <a:solidFill>
-              <a:srgbClr val="4B7A6A"/>
-            </a:solidFill>
-            <a:prstDash val="solid"/>
-            <a:headEnd type="none"/>
-            <a:tailEnd type="none"/>
-          </a:ln>
-        </p:spPr>
-      </p:sp>
-      <p:sp>
-        <p:nvSpPr>
-          <p:cNvPr id="53" name="Shape 51"/>
-          <p:cNvSpPr/>
-          <p:nvPr/>
-        </p:nvSpPr>
-        <p:spPr>
-          <a:xfrm>
-            <a:off x="6656832" y="2834640"/>
-            <a:ext cx="109728" cy="-109728"/>
-          </a:xfrm>
-          <a:prstGeom prst="line">
-            <a:avLst/>
-          </a:prstGeom>
-          <a:noFill/>
-          <a:ln w="13970">
-            <a:solidFill>
-              <a:srgbClr val="4B7A6A"/>
-            </a:solidFill>
-            <a:prstDash val="solid"/>
-            <a:headEnd type="none"/>
-            <a:tailEnd type="none"/>
-          </a:ln>
-        </p:spPr>
-      </p:sp>
-      <p:sp>
-        <p:nvSpPr>
-          <p:cNvPr id="54" name="Shape 52"/>
-          <p:cNvSpPr/>
-          <p:nvPr/>
-        </p:nvSpPr>
-        <p:spPr>
-          <a:xfrm>
-            <a:off x="5276088" y="2761488"/>
-            <a:ext cx="347472" cy="-182880"/>
-          </a:xfrm>
-          <a:prstGeom prst="line">
-            <a:avLst/>
-          </a:prstGeom>
-          <a:noFill/>
-          <a:ln w="16510">
-            <a:solidFill>
-              <a:srgbClr val="C96F47"/>
-            </a:solidFill>
-            <a:prstDash val="solid"/>
-            <a:headEnd type="none"/>
-            <a:tailEnd type="none"/>
-          </a:ln>
-        </p:spPr>
-      </p:sp>
-      <p:sp>
-        <p:nvSpPr>
-          <p:cNvPr id="55" name="Shape 53"/>
-          <p:cNvSpPr/>
-          <p:nvPr/>
-        </p:nvSpPr>
-        <p:spPr>
-          <a:xfrm>
-            <a:off x="5623560" y="2578608"/>
-            <a:ext cx="2468880" cy="0"/>
-          </a:xfrm>
-          <a:prstGeom prst="line">
-            <a:avLst/>
-          </a:prstGeom>
-          <a:noFill/>
-          <a:ln w="16510">
-            <a:solidFill>
-              <a:srgbClr val="C96F47"/>
-            </a:solidFill>
-            <a:prstDash val="solid"/>
-            <a:headEnd type="none"/>
-            <a:tailEnd type="none"/>
-          </a:ln>
-        </p:spPr>
-      </p:sp>
-      <p:sp>
-        <p:nvSpPr>
-          <p:cNvPr id="56" name="Shape 54"/>
-          <p:cNvSpPr/>
-          <p:nvPr/>
-        </p:nvSpPr>
-        <p:spPr>
-          <a:xfrm>
-            <a:off x="8092440" y="2578608"/>
-            <a:ext cx="274320" cy="667512"/>
-          </a:xfrm>
-          <a:prstGeom prst="line">
-            <a:avLst/>
-          </a:prstGeom>
-          <a:noFill/>
-          <a:ln w="16510">
-            <a:solidFill>
-              <a:srgbClr val="C96F47"/>
-            </a:solidFill>
-            <a:prstDash val="solid"/>
-            <a:headEnd type="none"/>
-            <a:tailEnd type="none"/>
-          </a:ln>
-        </p:spPr>
-      </p:sp>
-      <p:sp>
-        <p:nvSpPr>
-          <p:cNvPr id="57" name="Shape 55"/>
-          <p:cNvSpPr/>
-          <p:nvPr/>
-        </p:nvSpPr>
-        <p:spPr>
-          <a:xfrm>
-            <a:off x="5358384" y="2624328"/>
-            <a:ext cx="0" cy="182880"/>
-          </a:xfrm>
-          <a:prstGeom prst="line">
-            <a:avLst/>
-          </a:prstGeom>
-          <a:noFill/>
-          <a:ln w="16510">
-            <a:solidFill>
-              <a:srgbClr val="C96F47"/>
-            </a:solidFill>
-            <a:prstDash val="solid"/>
-            <a:headEnd type="none"/>
-            <a:tailEnd type="none"/>
-          </a:ln>
-        </p:spPr>
-      </p:sp>
-      <p:sp>
-        <p:nvSpPr>
-          <p:cNvPr id="58" name="Shape 56"/>
-          <p:cNvSpPr/>
-          <p:nvPr/>
-        </p:nvSpPr>
-        <p:spPr>
-          <a:xfrm>
-            <a:off x="8321040" y="3200400"/>
-            <a:ext cx="-109728" cy="0"/>
-          </a:xfrm>
-          <a:prstGeom prst="line">
-            <a:avLst/>
-          </a:prstGeom>
-          <a:noFill/>
-          <a:ln w="13970">
-            <a:solidFill>
-              <a:srgbClr val="C96F47"/>
-            </a:solidFill>
-            <a:prstDash val="solid"/>
-            <a:headEnd type="none"/>
-            <a:tailEnd type="none"/>
-          </a:ln>
-        </p:spPr>
-      </p:sp>
-      <p:sp>
-        <p:nvSpPr>
-          <p:cNvPr id="59" name="Shape 57"/>
-          <p:cNvSpPr/>
-          <p:nvPr/>
-        </p:nvSpPr>
-        <p:spPr>
-          <a:xfrm>
-            <a:off x="8321040" y="3200400"/>
-            <a:ext cx="-109728" cy="-109728"/>
-          </a:xfrm>
-          <a:prstGeom prst="line">
-            <a:avLst/>
-          </a:prstGeom>
-          <a:noFill/>
-          <a:ln w="13970">
-            <a:solidFill>
-              <a:srgbClr val="C96F47"/>
-            </a:solidFill>
-            <a:prstDash val="solid"/>
-            <a:headEnd type="none"/>
-            <a:tailEnd type="none"/>
-          </a:ln>
-        </p:spPr>
-      </p:sp>
-      <p:sp>
-        <p:nvSpPr>
-          <p:cNvPr id="60" name="Shape 58"/>
-          <p:cNvSpPr/>
-          <p:nvPr/>
-        </p:nvSpPr>
-        <p:spPr>
-          <a:xfrm>
-            <a:off x="8321040" y="3200400"/>
-            <a:ext cx="-109728" cy="109728"/>
-          </a:xfrm>
-          <a:prstGeom prst="line">
-            <a:avLst/>
-          </a:prstGeom>
-          <a:noFill/>
-          <a:ln w="13970">
-            <a:solidFill>
-              <a:srgbClr val="C96F47"/>
-            </a:solidFill>
-            <a:prstDash val="solid"/>
-            <a:headEnd type="none"/>
-            <a:tailEnd type="none"/>
-          </a:ln>
-        </p:spPr>
-      </p:sp>
-      <p:sp>
-        <p:nvSpPr>
-          <p:cNvPr id="61" name="Shape 59"/>
-          <p:cNvSpPr/>
-          <p:nvPr/>
-        </p:nvSpPr>
-        <p:spPr>
-          <a:xfrm>
-            <a:off x="7680960" y="1847088"/>
-            <a:ext cx="1691640" cy="1014984"/>
-          </a:xfrm>
-          <a:prstGeom prst="line">
-            <a:avLst/>
-          </a:prstGeom>
-          <a:noFill/>
-          <a:ln w="16510">
-            <a:solidFill>
-              <a:srgbClr val="4B7A6A"/>
-            </a:solidFill>
-            <a:prstDash val="solid"/>
-            <a:headEnd type="none"/>
-            <a:tailEnd type="none"/>
-          </a:ln>
-        </p:spPr>
-      </p:sp>
-      <p:sp>
-        <p:nvSpPr>
-          <p:cNvPr id="62" name="Shape 60"/>
-          <p:cNvSpPr/>
-          <p:nvPr/>
-        </p:nvSpPr>
-        <p:spPr>
-          <a:xfrm>
-            <a:off x="7790688" y="1828800"/>
-            <a:ext cx="0" cy="182880"/>
-          </a:xfrm>
-          <a:prstGeom prst="line">
-            <a:avLst/>
-          </a:prstGeom>
-          <a:noFill/>
-          <a:ln w="16510">
-            <a:solidFill>
-              <a:srgbClr val="4B7A6A"/>
-            </a:solidFill>
-            <a:prstDash val="solid"/>
-            <a:headEnd type="none"/>
-            <a:tailEnd type="none"/>
-          </a:ln>
-        </p:spPr>
-      </p:sp>
-      <p:sp>
-        <p:nvSpPr>
-          <p:cNvPr id="63" name="Shape 61"/>
-          <p:cNvSpPr/>
-          <p:nvPr/>
-        </p:nvSpPr>
-        <p:spPr>
-          <a:xfrm>
-            <a:off x="9281160" y="2816352"/>
-            <a:ext cx="0" cy="-109728"/>
-          </a:xfrm>
-          <a:prstGeom prst="line">
-            <a:avLst/>
-          </a:prstGeom>
-          <a:noFill/>
-          <a:ln w="13970">
-            <a:solidFill>
-              <a:srgbClr val="4B7A6A"/>
-            </a:solidFill>
-            <a:prstDash val="solid"/>
-            <a:headEnd type="none"/>
-            <a:tailEnd type="none"/>
-          </a:ln>
-        </p:spPr>
-      </p:sp>
-      <p:sp>
-        <p:nvSpPr>
-          <p:cNvPr id="64" name="Shape 62"/>
-          <p:cNvSpPr/>
-          <p:nvPr/>
-        </p:nvSpPr>
-        <p:spPr>
-          <a:xfrm>
-            <a:off x="9281160" y="2816352"/>
-            <a:ext cx="-109728" cy="-109728"/>
-          </a:xfrm>
-          <a:prstGeom prst="line">
-            <a:avLst/>
-          </a:prstGeom>
-          <a:noFill/>
-          <a:ln w="13970">
-            <a:solidFill>
-              <a:srgbClr val="4B7A6A"/>
-            </a:solidFill>
-            <a:prstDash val="solid"/>
-            <a:headEnd type="none"/>
-            <a:tailEnd type="none"/>
-          </a:ln>
-        </p:spPr>
-      </p:sp>
-      <p:sp>
-        <p:nvSpPr>
-          <p:cNvPr id="65" name="Shape 63"/>
-          <p:cNvSpPr/>
-          <p:nvPr/>
-        </p:nvSpPr>
-        <p:spPr>
-          <a:xfrm>
-            <a:off x="9281160" y="2816352"/>
-            <a:ext cx="109728" cy="-109728"/>
-          </a:xfrm>
-          <a:prstGeom prst="line">
-            <a:avLst/>
-          </a:prstGeom>
-          <a:noFill/>
-          <a:ln w="13970">
-            <a:solidFill>
-              <a:srgbClr val="4B7A6A"/>
-            </a:solidFill>
-            <a:prstDash val="solid"/>
-            <a:headEnd type="none"/>
-            <a:tailEnd type="none"/>
-          </a:ln>
-        </p:spPr>
-      </p:sp>
-      <p:sp>
-        <p:nvSpPr>
-          <p:cNvPr id="66" name="Shape 64"/>
-          <p:cNvSpPr/>
-          <p:nvPr/>
-        </p:nvSpPr>
-        <p:spPr>
-          <a:xfrm>
-            <a:off x="9363456" y="4416552"/>
-            <a:ext cx="0" cy="384048"/>
-          </a:xfrm>
-          <a:prstGeom prst="line">
-            <a:avLst/>
-          </a:prstGeom>
-          <a:noFill/>
-          <a:ln w="16510">
-            <a:solidFill>
-              <a:srgbClr val="163A45"/>
-            </a:solidFill>
-            <a:prstDash val="solid"/>
-            <a:headEnd type="none"/>
-            <a:tailEnd type="none"/>
-          </a:ln>
-        </p:spPr>
-      </p:sp>
-      <p:sp>
-        <p:nvSpPr>
-          <p:cNvPr id="67" name="Shape 65"/>
-          <p:cNvSpPr/>
-          <p:nvPr/>
-        </p:nvSpPr>
-        <p:spPr>
-          <a:xfrm>
-            <a:off x="9272016" y="4498848"/>
-            <a:ext cx="182880" cy="0"/>
-          </a:xfrm>
-          <a:prstGeom prst="line">
-            <a:avLst/>
-          </a:prstGeom>
-          <a:noFill/>
-          <a:ln w="16510">
-            <a:solidFill>
-              <a:srgbClr val="163A45"/>
-            </a:solidFill>
-            <a:prstDash val="solid"/>
-            <a:headEnd type="none"/>
-            <a:tailEnd type="none"/>
-          </a:ln>
-        </p:spPr>
-      </p:sp>
-      <p:sp>
-        <p:nvSpPr>
-          <p:cNvPr id="68" name="Shape 66"/>
-          <p:cNvSpPr/>
-          <p:nvPr/>
-        </p:nvSpPr>
-        <p:spPr>
-          <a:xfrm>
-            <a:off x="9272016" y="4727448"/>
-            <a:ext cx="182880" cy="0"/>
-          </a:xfrm>
-          <a:prstGeom prst="line">
-            <a:avLst/>
-          </a:prstGeom>
-          <a:noFill/>
-          <a:ln w="16510">
-            <a:solidFill>
-              <a:srgbClr val="163A45"/>
-            </a:solidFill>
-            <a:prstDash val="solid"/>
-            <a:headEnd type="none"/>
-            <a:tailEnd type="none"/>
-          </a:ln>
-        </p:spPr>
-      </p:sp>
-      <p:sp>
-        <p:nvSpPr>
-          <p:cNvPr id="69" name="Text 67"/>
-          <p:cNvSpPr/>
-          <p:nvPr/>
-        </p:nvSpPr>
-        <p:spPr>
-          <a:xfrm rot="1320000">
-            <a:off x="2331720" y="1664208"/>
-            <a:ext cx="731520" cy="201168"/>
-          </a:xfrm>
-          <a:prstGeom prst="rect">
-            <a:avLst/>
-          </a:prstGeom>
-          <a:noFill/>
-          <a:ln/>
-        </p:spPr>
-        <p:txBody>
-          <a:bodyPr wrap="square" lIns="0" tIns="0" rIns="0" bIns="0" rtlCol="0" anchor="ctr"/>
-          <a:lstStyle/>
-          <a:p>
-            <a:pPr indent="0" marL="0">
-              <a:buNone/>
-            </a:pPr>
-            <a:r>
-              <a:rPr lang="en-US" sz="900" dirty="0">
-                <a:solidFill>
-                  <a:srgbClr val="6B7280"/>
-                </a:solidFill>
-              </a:rPr>
-              <a:t>1 : many</a:t>
-            </a:r>
-            <a:endParaRPr lang="en-US" sz="900" dirty="0"/>
-          </a:p>
-        </p:txBody>
-      </p:sp>
-      <p:sp>
-        <p:nvSpPr>
-          <p:cNvPr id="70" name="Text 68"/>
-          <p:cNvSpPr/>
-          <p:nvPr/>
-        </p:nvSpPr>
-        <p:spPr>
-          <a:xfrm>
-            <a:off x="5276088" y="4434840"/>
-            <a:ext cx="1463040" cy="228600"/>
-          </a:xfrm>
-          <a:prstGeom prst="rect">
-            <a:avLst/>
-          </a:prstGeom>
-          <a:noFill/>
-          <a:ln/>
-        </p:spPr>
-        <p:txBody>
-          <a:bodyPr wrap="square" lIns="0" tIns="0" rIns="0" bIns="0" rtlCol="0" anchor="ctr"/>
-          <a:lstStyle/>
-          <a:p>
-            <a:pPr indent="0" marL="0">
-              <a:buNone/>
-            </a:pPr>
-            <a:r>
-              <a:rPr lang="en-US" sz="1020" i="1" dirty="0">
-                <a:solidFill>
-                  <a:srgbClr val="6B7280"/>
-                </a:solidFill>
-              </a:rPr>
-              <a:t>associative link</a:t>
-            </a:r>
-            <a:endParaRPr lang="en-US" sz="1020" dirty="0"/>
-          </a:p>
-        </p:txBody>
-      </p:sp>
-      <p:sp>
-        <p:nvSpPr>
-          <p:cNvPr id="71" name="Text 69"/>
-          <p:cNvSpPr/>
-          <p:nvPr/>
-        </p:nvSpPr>
-        <p:spPr>
-          <a:xfrm>
-            <a:off x="9555480" y="4498848"/>
-            <a:ext cx="731520" cy="201168"/>
-          </a:xfrm>
-          <a:prstGeom prst="rect">
-            <a:avLst/>
-          </a:prstGeom>
-          <a:noFill/>
-          <a:ln/>
-        </p:spPr>
-        <p:txBody>
-          <a:bodyPr wrap="square" lIns="0" tIns="0" rIns="0" bIns="0" rtlCol="0" anchor="ctr"/>
-          <a:lstStyle/>
-          <a:p>
-            <a:pPr indent="0" marL="0">
-              <a:buNone/>
-            </a:pPr>
-            <a:r>
-              <a:rPr lang="en-US" sz="900" dirty="0">
-                <a:solidFill>
-                  <a:srgbClr val="6B7280"/>
-                </a:solidFill>
-              </a:rPr>
-              <a:t>1 : 0..1</a:t>
-            </a:r>
-            <a:endParaRPr lang="en-US" sz="900" dirty="0"/>
-          </a:p>
-        </p:txBody>
-      </p:sp>
-      <p:sp>
-        <p:nvSpPr>
-          <p:cNvPr id="72" name="Shape 70"/>
-          <p:cNvSpPr/>
-          <p:nvPr/>
-        </p:nvSpPr>
-        <p:spPr>
-          <a:xfrm>
-            <a:off x="685800" y="5806440"/>
-            <a:ext cx="4069080" cy="329184"/>
-          </a:xfrm>
-          <a:prstGeom prst="roundRect">
-            <a:avLst>
-              <a:gd name="adj" fmla="val 19444"/>
-            </a:avLst>
-          </a:prstGeom>
-          <a:solidFill>
-            <a:srgbClr val="DCE8EC"/>
-          </a:solidFill>
-          <a:ln w="12700">
-            <a:solidFill>
-              <a:srgbClr val="DCE8EC"/>
-            </a:solidFill>
-            <a:prstDash val="solid"/>
-          </a:ln>
-        </p:spPr>
-      </p:sp>
-      <p:sp>
-        <p:nvSpPr>
-          <p:cNvPr id="73" name="Text 71"/>
-          <p:cNvSpPr/>
-          <p:nvPr/>
-        </p:nvSpPr>
-        <p:spPr>
-          <a:xfrm>
-            <a:off x="758952" y="5879592"/>
-            <a:ext cx="3922776" cy="146304"/>
-          </a:xfrm>
-          <a:prstGeom prst="rect">
-            <a:avLst/>
-          </a:prstGeom>
-          <a:noFill/>
-          <a:ln/>
-        </p:spPr>
-        <p:txBody>
-          <a:bodyPr wrap="square" lIns="0" tIns="0" rIns="0" bIns="0" rtlCol="0" anchor="ctr"/>
-          <a:lstStyle/>
-          <a:p>
-            <a:pPr algn="ctr" indent="0" marL="0">
-              <a:buNone/>
-            </a:pPr>
-            <a:r>
-              <a:rPr lang="en-US" sz="1050" b="1" dirty="0">
-                <a:solidFill>
-                  <a:srgbClr val="163A45"/>
-                </a:solidFill>
-              </a:rPr>
-              <a:t>VIEWING resolves Buyer ↔ Property interaction</a:t>
-            </a:r>
-            <a:endParaRPr lang="en-US" sz="1050" dirty="0"/>
-          </a:p>
-        </p:txBody>
-      </p:sp>
-      <p:sp>
-        <p:nvSpPr>
-          <p:cNvPr id="74" name="Shape 72"/>
-          <p:cNvSpPr/>
-          <p:nvPr/>
-        </p:nvSpPr>
-        <p:spPr>
-          <a:xfrm>
-            <a:off x="7772400" y="5897880"/>
-            <a:ext cx="2423160" cy="329184"/>
-          </a:xfrm>
-          <a:prstGeom prst="roundRect">
-            <a:avLst>
-              <a:gd name="adj" fmla="val 19444"/>
-            </a:avLst>
-          </a:prstGeom>
-          <a:solidFill>
-            <a:srgbClr val="F1DDD5"/>
-          </a:solidFill>
-          <a:ln w="12700">
-            <a:solidFill>
-              <a:srgbClr val="F1DDD5"/>
-            </a:solidFill>
-            <a:prstDash val="solid"/>
-          </a:ln>
-        </p:spPr>
-      </p:sp>
-      <p:sp>
-        <p:nvSpPr>
-          <p:cNvPr id="75" name="Text 73"/>
-          <p:cNvSpPr/>
-          <p:nvPr/>
-        </p:nvSpPr>
-        <p:spPr>
-          <a:xfrm>
-            <a:off x="7845552" y="5971032"/>
-            <a:ext cx="2276856" cy="146304"/>
-          </a:xfrm>
-          <a:prstGeom prst="rect">
-            <a:avLst/>
-          </a:prstGeom>
-          <a:noFill/>
-          <a:ln/>
-        </p:spPr>
-        <p:txBody>
-          <a:bodyPr wrap="square" lIns="0" tIns="0" rIns="0" bIns="0" rtlCol="0" anchor="ctr"/>
-          <a:lstStyle/>
-          <a:p>
-            <a:pPr algn="ctr" indent="0" marL="0">
-              <a:buNone/>
-            </a:pPr>
-            <a:r>
-              <a:rPr lang="en-US" sz="1050" b="1" dirty="0">
-                <a:solidFill>
-                  <a:srgbClr val="C96F47"/>
-                </a:solidFill>
-              </a:rPr>
-              <a:t>SALE.offer_id is UNIQUE</a:t>
-            </a:r>
-            <a:endParaRPr lang="en-US" sz="1050" dirty="0"/>
-          </a:p>
-        </p:txBody>
-      </p:sp>
-      <p:sp>
-        <p:nvSpPr>
-          <p:cNvPr id="25" name="Slide Number Placeholder 0"/>
-          <p:cNvSpPr>
-            <a:spLocks noGrp="1"/>
-          </p:cNvSpPr>
-          <p:nvPr>
-            <p:ph type="sldNum" sz="quarter" idx="4294967295"/>
-          </p:nvPr>
-        </p:nvSpPr>
-        <p:spPr>
-          <a:xfrm>
-            <a:off x="11750040" y="6492240"/>
-            <a:ext cx="800000" cy="300000"/>
-          </a:xfrm>
-          <a:prstGeom prst="rect">
-            <a:avLst/>
-          </a:prstGeom>
-          <a:extLst>
-            <a:ext uri="{C572A759-6A51-4108-AA02-DFA0A04FC94B}">
-              <ma14:wrappingTextBoxFlag xmlns:ma14="http://schemas.microsoft.com/office/mac/drawingml/2011/main" val="0"/>
-            </a:ext>
-          </a:extLst>
-        </p:spPr>
-        <p:txBody>
-          <a:bodyPr/>
-          <a:lstStyle>
-            <a:lvl1pPr>
-              <a:defRPr sz="900">
-                <a:solidFill>
-                  <a:srgbClr val="6B7280"/>
-                </a:solidFill>
-                <a:latin typeface="Carlito"/>
-                <a:ea typeface="Carlito"/>
-                <a:cs typeface="Carlito"/>
-              </a:defRPr>
-            </a:lvl1pPr>
-          </a:lstStyle>
-          <a:p>
-            <a:pPr algn="l"/>
-            <a:fld id="{F7021451-1387-4CA6-816F-3879F97B5CBC}" type="slidenum">
-              <a:rPr b="0" lang="en-US"/>
-              <a:t>9</a:t>
-            </a:fld>
-            <a:endParaRPr lang="en-US"/>
-          </a:p>
-        </p:txBody>
-      </p:sp>
+      <p:pic>
+        <p:nvPicPr>
+          <p:cNvPr id="2" name="Picture 1" descr="NestUp_ERD_Final.png"/>
+          <p:cNvPicPr>
+            <a:picLocks noChangeAspect="1"/>
+          </p:cNvPicPr>
+          <p:nvPr/>
+        </p:nvPicPr>
+        <p:blipFill>
+          <a:blip r:embed="rId4"/>
+          <a:stretch>
+            <a:fillRect/>
+          </a:stretch>
+        </p:blipFill>
+        <p:spPr>
+          <a:xfrm>
+            <a:off x="0" y="0"/>
+            <a:ext cx="12192000" cy="6858000"/>
+          </a:xfrm>
+          <a:prstGeom prst="rect">
+            <a:avLst/>
+          </a:prstGeom>
+        </p:spPr>
+      </p:pic>
     </p:spTree>
   </p:cSld>
   <p:clrMapOvr>
